--- a/INCREMENTO2/PPTS/PPt Segundo incremento scrum++.pptx
+++ b/INCREMENTO2/PPTS/PPt Segundo incremento scrum++.pptx
@@ -5,22 +5,20 @@
     <p:sldMasterId id="2147483695" r:id="rId1"/>
   </p:sldMasterIdLst>
   <p:notesMasterIdLst>
-    <p:notesMasterId r:id="rId15"/>
+    <p:notesMasterId r:id="rId13"/>
   </p:notesMasterIdLst>
   <p:sldIdLst>
     <p:sldId id="256" r:id="rId2"/>
     <p:sldId id="267" r:id="rId3"/>
     <p:sldId id="257" r:id="rId4"/>
-    <p:sldId id="258" r:id="rId5"/>
-    <p:sldId id="259" r:id="rId6"/>
-    <p:sldId id="260" r:id="rId7"/>
-    <p:sldId id="261" r:id="rId8"/>
-    <p:sldId id="270" r:id="rId9"/>
-    <p:sldId id="271" r:id="rId10"/>
-    <p:sldId id="269" r:id="rId11"/>
-    <p:sldId id="268" r:id="rId12"/>
-    <p:sldId id="265" r:id="rId13"/>
-    <p:sldId id="266" r:id="rId14"/>
+    <p:sldId id="259" r:id="rId5"/>
+    <p:sldId id="272" r:id="rId6"/>
+    <p:sldId id="273" r:id="rId7"/>
+    <p:sldId id="274" r:id="rId8"/>
+    <p:sldId id="261" r:id="rId9"/>
+    <p:sldId id="275" r:id="rId10"/>
+    <p:sldId id="266" r:id="rId11"/>
+    <p:sldId id="276" r:id="rId12"/>
   </p:sldIdLst>
   <p:sldSz cx="9144000" cy="6858000" type="screen4x3"/>
   <p:notesSz cx="6858000" cy="9144000"/>
@@ -220,7 +218,7 @@
           <a:p>
             <a:fld id="{56824AA8-F311-4ABC-8748-4A852C5A6ECD}" type="datetimeFigureOut">
               <a:rPr lang="es-419" smtClean="0"/>
-              <a:t>22/8/2025</a:t>
+              <a:t>2/10/2025</a:t>
             </a:fld>
             <a:endParaRPr lang="es-419"/>
           </a:p>
@@ -1366,7 +1364,7 @@
           <a:p>
             <a:fld id="{5BCAD085-E8A6-8845-BD4E-CB4CCA059FC4}" type="datetimeFigureOut">
               <a:rPr lang="en-US" smtClean="0"/>
-              <a:t>8/22/2025</a:t>
+              <a:t>10/2/2025</a:t>
             </a:fld>
             <a:endParaRPr lang="en-US"/>
           </a:p>
@@ -1617,7 +1615,7 @@
           <a:p>
             <a:fld id="{5BCAD085-E8A6-8845-BD4E-CB4CCA059FC4}" type="datetimeFigureOut">
               <a:rPr lang="en-US" smtClean="0"/>
-              <a:t>8/22/2025</a:t>
+              <a:t>10/2/2025</a:t>
             </a:fld>
             <a:endParaRPr lang="en-US"/>
           </a:p>
@@ -1931,7 +1929,7 @@
           <a:p>
             <a:fld id="{5BCAD085-E8A6-8845-BD4E-CB4CCA059FC4}" type="datetimeFigureOut">
               <a:rPr lang="en-US" smtClean="0"/>
-              <a:t>8/22/2025</a:t>
+              <a:t>10/2/2025</a:t>
             </a:fld>
             <a:endParaRPr lang="en-US"/>
           </a:p>
@@ -2264,7 +2262,7 @@
           <a:p>
             <a:fld id="{5BCAD085-E8A6-8845-BD4E-CB4CCA059FC4}" type="datetimeFigureOut">
               <a:rPr lang="en-US" smtClean="0"/>
-              <a:t>8/22/2025</a:t>
+              <a:t>10/2/2025</a:t>
             </a:fld>
             <a:endParaRPr lang="en-US"/>
           </a:p>
@@ -2578,7 +2576,7 @@
           <a:p>
             <a:fld id="{5BCAD085-E8A6-8845-BD4E-CB4CCA059FC4}" type="datetimeFigureOut">
               <a:rPr lang="en-US" smtClean="0"/>
-              <a:t>8/22/2025</a:t>
+              <a:t>10/2/2025</a:t>
             </a:fld>
             <a:endParaRPr lang="en-US"/>
           </a:p>
@@ -2971,7 +2969,7 @@
           <a:p>
             <a:fld id="{5BCAD085-E8A6-8845-BD4E-CB4CCA059FC4}" type="datetimeFigureOut">
               <a:rPr lang="en-US" smtClean="0"/>
-              <a:t>8/22/2025</a:t>
+              <a:t>10/2/2025</a:t>
             </a:fld>
             <a:endParaRPr lang="en-US"/>
           </a:p>
@@ -3141,7 +3139,7 @@
           <a:p>
             <a:fld id="{5BCAD085-E8A6-8845-BD4E-CB4CCA059FC4}" type="datetimeFigureOut">
               <a:rPr lang="en-US" smtClean="0"/>
-              <a:t>8/22/2025</a:t>
+              <a:t>10/2/2025</a:t>
             </a:fld>
             <a:endParaRPr lang="en-US"/>
           </a:p>
@@ -3321,7 +3319,7 @@
           <a:p>
             <a:fld id="{5BCAD085-E8A6-8845-BD4E-CB4CCA059FC4}" type="datetimeFigureOut">
               <a:rPr lang="en-US" smtClean="0"/>
-              <a:t>8/22/2025</a:t>
+              <a:t>10/2/2025</a:t>
             </a:fld>
             <a:endParaRPr lang="en-US"/>
           </a:p>
@@ -3491,7 +3489,7 @@
           <a:p>
             <a:fld id="{5BCAD085-E8A6-8845-BD4E-CB4CCA059FC4}" type="datetimeFigureOut">
               <a:rPr lang="en-US" smtClean="0"/>
-              <a:t>8/22/2025</a:t>
+              <a:t>10/2/2025</a:t>
             </a:fld>
             <a:endParaRPr lang="en-US"/>
           </a:p>
@@ -3738,7 +3736,7 @@
           <a:p>
             <a:fld id="{5BCAD085-E8A6-8845-BD4E-CB4CCA059FC4}" type="datetimeFigureOut">
               <a:rPr lang="en-US" smtClean="0"/>
-              <a:t>8/22/2025</a:t>
+              <a:t>10/2/2025</a:t>
             </a:fld>
             <a:endParaRPr lang="en-US"/>
           </a:p>
@@ -4035,7 +4033,7 @@
           <a:p>
             <a:fld id="{5BCAD085-E8A6-8845-BD4E-CB4CCA059FC4}" type="datetimeFigureOut">
               <a:rPr lang="en-US" smtClean="0"/>
-              <a:t>8/22/2025</a:t>
+              <a:t>10/2/2025</a:t>
             </a:fld>
             <a:endParaRPr lang="en-US"/>
           </a:p>
@@ -4414,7 +4412,7 @@
           <a:p>
             <a:fld id="{5BCAD085-E8A6-8845-BD4E-CB4CCA059FC4}" type="datetimeFigureOut">
               <a:rPr lang="en-US" smtClean="0"/>
-              <a:t>8/22/2025</a:t>
+              <a:t>10/2/2025</a:t>
             </a:fld>
             <a:endParaRPr lang="en-US"/>
           </a:p>
@@ -4537,7 +4535,7 @@
           <a:p>
             <a:fld id="{5BCAD085-E8A6-8845-BD4E-CB4CCA059FC4}" type="datetimeFigureOut">
               <a:rPr lang="en-US" smtClean="0"/>
-              <a:t>8/22/2025</a:t>
+              <a:t>10/2/2025</a:t>
             </a:fld>
             <a:endParaRPr lang="en-US"/>
           </a:p>
@@ -4632,7 +4630,7 @@
           <a:p>
             <a:fld id="{5BCAD085-E8A6-8845-BD4E-CB4CCA059FC4}" type="datetimeFigureOut">
               <a:rPr lang="en-US" smtClean="0"/>
-              <a:t>8/22/2025</a:t>
+              <a:t>10/2/2025</a:t>
             </a:fld>
             <a:endParaRPr lang="en-US"/>
           </a:p>
@@ -4887,7 +4885,7 @@
           <a:p>
             <a:fld id="{5BCAD085-E8A6-8845-BD4E-CB4CCA059FC4}" type="datetimeFigureOut">
               <a:rPr lang="en-US" smtClean="0"/>
-              <a:t>8/22/2025</a:t>
+              <a:t>10/2/2025</a:t>
             </a:fld>
             <a:endParaRPr lang="en-US"/>
           </a:p>
@@ -5150,7 +5148,7 @@
           <a:p>
             <a:fld id="{5BCAD085-E8A6-8845-BD4E-CB4CCA059FC4}" type="datetimeFigureOut">
               <a:rPr lang="en-US" smtClean="0"/>
-              <a:t>8/22/2025</a:t>
+              <a:t>10/2/2025</a:t>
             </a:fld>
             <a:endParaRPr lang="en-US"/>
           </a:p>
@@ -5964,7 +5962,7 @@
           <a:p>
             <a:fld id="{5BCAD085-E8A6-8845-BD4E-CB4CCA059FC4}" type="datetimeFigureOut">
               <a:rPr lang="en-US" smtClean="0"/>
-              <a:t>8/22/2025</a:t>
+              <a:t>10/2/2025</a:t>
             </a:fld>
             <a:endParaRPr lang="en-US"/>
           </a:p>
@@ -6511,7 +6509,7 @@
                 <a:latin typeface="Times New Roman" panose="02020603050405020304" pitchFamily="18" charset="0"/>
                 <a:cs typeface="Times New Roman" panose="02020603050405020304" pitchFamily="18" charset="0"/>
               </a:rPr>
-              <a:t>PROYECTO INGENIERÍA DE SOFTWARE PRIMER INCREMENTO PARA EL SISTEMA BIOMÉTRICO WEB EUGCOM</a:t>
+              <a:t>PROYECTO INGENIERÍA DE SOFTWARE SEGUNDO INCREMENTO PARA EL SISTEMA BIOMÉTRICO WEB EUGCOM</a:t>
             </a:r>
             <a:endParaRPr lang="es-CL" sz="2000" dirty="0">
               <a:latin typeface="Times New Roman" panose="02020603050405020304" pitchFamily="18" charset="0"/>
@@ -6606,16 +6604,12 @@
               <a:buNone/>
             </a:pPr>
             <a:r>
-              <a:rPr lang="es-CL" sz="1100">
+              <a:rPr lang="es-CL" sz="1100" dirty="0">
                 <a:latin typeface="Times New Roman" panose="02020603050405020304" pitchFamily="18" charset="0"/>
                 <a:cs typeface="Times New Roman" panose="02020603050405020304" pitchFamily="18" charset="0"/>
               </a:rPr>
               <a:t>Catalina Vidal Gallarda</a:t>
             </a:r>
-            <a:endParaRPr lang="es-CL" sz="1100" dirty="0">
-              <a:latin typeface="Times New Roman" panose="02020603050405020304" pitchFamily="18" charset="0"/>
-              <a:cs typeface="Times New Roman" panose="02020603050405020304" pitchFamily="18" charset="0"/>
-            </a:endParaRPr>
           </a:p>
           <a:p>
             <a:pPr marL="0" indent="0">
@@ -6724,7 +6718,7 @@
                 <a:latin typeface="Times New Roman" panose="02020603050405020304" pitchFamily="18" charset="0"/>
                 <a:cs typeface="Times New Roman" panose="02020603050405020304" pitchFamily="18" charset="0"/>
               </a:rPr>
-              <a:t>15 de julio 2025, Santiago, Chile</a:t>
+              <a:t>29 de Septiembre 2025, Santiago, Chile</a:t>
             </a:r>
           </a:p>
         </p:txBody>
@@ -6859,466 +6853,6 @@
 </file>
 
 <file path=ppt/slides/slide10.xml><?xml version="1.0" encoding="utf-8"?>
-<p:sld xmlns:a="http://schemas.openxmlformats.org/drawingml/2006/main" xmlns:r="http://schemas.openxmlformats.org/officeDocument/2006/relationships" xmlns:p="http://schemas.openxmlformats.org/presentationml/2006/main">
-  <p:cSld>
-    <p:spTree>
-      <p:nvGrpSpPr>
-        <p:cNvPr id="1" name=""/>
-        <p:cNvGrpSpPr/>
-        <p:nvPr/>
-      </p:nvGrpSpPr>
-      <p:grpSpPr>
-        <a:xfrm>
-          <a:off x="0" y="0"/>
-          <a:ext cx="0" cy="0"/>
-          <a:chOff x="0" y="0"/>
-          <a:chExt cx="0" cy="0"/>
-        </a:xfrm>
-      </p:grpSpPr>
-      <p:sp>
-        <p:nvSpPr>
-          <p:cNvPr id="2" name="Título 1">
-            <a:extLst>
-              <a:ext uri="{FF2B5EF4-FFF2-40B4-BE49-F238E27FC236}">
-                <a16:creationId xmlns:a16="http://schemas.microsoft.com/office/drawing/2014/main" id="{51D04868-6B6C-BC5F-4E76-EB6B6528B22E}"/>
-              </a:ext>
-            </a:extLst>
-          </p:cNvPr>
-          <p:cNvSpPr>
-            <a:spLocks noGrp="1"/>
-          </p:cNvSpPr>
-          <p:nvPr>
-            <p:ph type="title"/>
-          </p:nvPr>
-        </p:nvSpPr>
-        <p:spPr/>
-        <p:txBody>
-          <a:bodyPr/>
-          <a:lstStyle/>
-          <a:p>
-            <a:r>
-              <a:rPr lang="en-US" dirty="0"/>
-              <a:t>Vista Externa: Caso de Uso</a:t>
-            </a:r>
-            <a:endParaRPr lang="es-419" dirty="0"/>
-          </a:p>
-        </p:txBody>
-      </p:sp>
-      <p:pic>
-        <p:nvPicPr>
-          <p:cNvPr id="2050" name="Picture 2" descr="Interfaz de usuario gráfica, Texto&#10;&#10;El contenido generado por IA puede ser incorrecto., Imagen">
-            <a:extLst>
-              <a:ext uri="{FF2B5EF4-FFF2-40B4-BE49-F238E27FC236}">
-                <a16:creationId xmlns:a16="http://schemas.microsoft.com/office/drawing/2014/main" id="{05EE198D-28BE-CDE3-15EA-95DCED101161}"/>
-              </a:ext>
-            </a:extLst>
-          </p:cNvPr>
-          <p:cNvPicPr>
-            <a:picLocks noGrp="1" noChangeAspect="1" noChangeArrowheads="1"/>
-          </p:cNvPicPr>
-          <p:nvPr>
-            <p:ph idx="1"/>
-          </p:nvPr>
-        </p:nvPicPr>
-        <p:blipFill>
-          <a:blip r:embed="rId2">
-            <a:extLst>
-              <a:ext uri="{28A0092B-C50C-407E-A947-70E740481C1C}">
-                <a14:useLocalDpi xmlns:a14="http://schemas.microsoft.com/office/drawing/2010/main" val="0"/>
-              </a:ext>
-            </a:extLst>
-          </a:blip>
-          <a:srcRect/>
-          <a:stretch>
-            <a:fillRect/>
-          </a:stretch>
-        </p:blipFill>
-        <p:spPr bwMode="auto">
-          <a:xfrm>
-            <a:off x="1035075" y="1513246"/>
-            <a:ext cx="5377487" cy="4735154"/>
-          </a:xfrm>
-          <a:prstGeom prst="rect">
-            <a:avLst/>
-          </a:prstGeom>
-          <a:noFill/>
-          <a:extLst>
-            <a:ext uri="{909E8E84-426E-40DD-AFC4-6F175D3DCCD1}">
-              <a14:hiddenFill xmlns:a14="http://schemas.microsoft.com/office/drawing/2010/main">
-                <a:solidFill>
-                  <a:srgbClr val="FFFFFF"/>
-                </a:solidFill>
-              </a14:hiddenFill>
-            </a:ext>
-          </a:extLst>
-        </p:spPr>
-      </p:pic>
-      <p:pic>
-        <p:nvPicPr>
-          <p:cNvPr id="3" name="Imagen 2" descr="Icono&#10;&#10;El contenido generado por IA puede ser incorrecto.">
-            <a:extLst>
-              <a:ext uri="{FF2B5EF4-FFF2-40B4-BE49-F238E27FC236}">
-                <a16:creationId xmlns:a16="http://schemas.microsoft.com/office/drawing/2014/main" id="{509AC30C-D0A8-D9E2-7C1A-929CC29B8862}"/>
-              </a:ext>
-            </a:extLst>
-          </p:cNvPr>
-          <p:cNvPicPr>
-            <a:picLocks noChangeAspect="1"/>
-          </p:cNvPicPr>
-          <p:nvPr/>
-        </p:nvPicPr>
-        <p:blipFill>
-          <a:blip r:embed="rId3"/>
-          <a:stretch>
-            <a:fillRect/>
-          </a:stretch>
-        </p:blipFill>
-        <p:spPr>
-          <a:xfrm>
-            <a:off x="7764292" y="108352"/>
-            <a:ext cx="1137067" cy="956207"/>
-          </a:xfrm>
-          <a:prstGeom prst="rect">
-            <a:avLst/>
-          </a:prstGeom>
-        </p:spPr>
-      </p:pic>
-    </p:spTree>
-    <p:extLst>
-      <p:ext uri="{BB962C8B-B14F-4D97-AF65-F5344CB8AC3E}">
-        <p14:creationId xmlns:p14="http://schemas.microsoft.com/office/powerpoint/2010/main" val="2414588374"/>
-      </p:ext>
-    </p:extLst>
-  </p:cSld>
-  <p:clrMapOvr>
-    <a:masterClrMapping/>
-  </p:clrMapOvr>
-</p:sld>
-</file>
-
-<file path=ppt/slides/slide11.xml><?xml version="1.0" encoding="utf-8"?>
-<p:sld xmlns:a="http://schemas.openxmlformats.org/drawingml/2006/main" xmlns:r="http://schemas.openxmlformats.org/officeDocument/2006/relationships" xmlns:p="http://schemas.openxmlformats.org/presentationml/2006/main">
-  <p:cSld>
-    <p:spTree>
-      <p:nvGrpSpPr>
-        <p:cNvPr id="1" name=""/>
-        <p:cNvGrpSpPr/>
-        <p:nvPr/>
-      </p:nvGrpSpPr>
-      <p:grpSpPr>
-        <a:xfrm>
-          <a:off x="0" y="0"/>
-          <a:ext cx="0" cy="0"/>
-          <a:chOff x="0" y="0"/>
-          <a:chExt cx="0" cy="0"/>
-        </a:xfrm>
-      </p:grpSpPr>
-      <p:sp>
-        <p:nvSpPr>
-          <p:cNvPr id="2" name="Título 1">
-            <a:extLst>
-              <a:ext uri="{FF2B5EF4-FFF2-40B4-BE49-F238E27FC236}">
-                <a16:creationId xmlns:a16="http://schemas.microsoft.com/office/drawing/2014/main" id="{F3954F04-618E-965B-2846-4882C9D27CE3}"/>
-              </a:ext>
-            </a:extLst>
-          </p:cNvPr>
-          <p:cNvSpPr>
-            <a:spLocks noGrp="1"/>
-          </p:cNvSpPr>
-          <p:nvPr>
-            <p:ph type="title"/>
-          </p:nvPr>
-        </p:nvSpPr>
-        <p:spPr>
-          <a:xfrm>
-            <a:off x="242641" y="717874"/>
-            <a:ext cx="7213175" cy="693369"/>
-          </a:xfrm>
-        </p:spPr>
-        <p:txBody>
-          <a:bodyPr>
-            <a:normAutofit/>
-          </a:bodyPr>
-          <a:lstStyle/>
-          <a:p>
-            <a:r>
-              <a:rPr lang="en-US" sz="2800" dirty="0"/>
-              <a:t>Vista de </a:t>
-            </a:r>
-            <a:r>
-              <a:rPr lang="en-US" sz="2800" dirty="0" err="1"/>
-              <a:t>proceso</a:t>
-            </a:r>
-            <a:r>
-              <a:rPr lang="en-US" sz="2800" dirty="0"/>
-              <a:t>: Diagrama de secuencia</a:t>
-            </a:r>
-            <a:endParaRPr lang="es-419" sz="2800" dirty="0"/>
-          </a:p>
-        </p:txBody>
-      </p:sp>
-      <p:pic>
-        <p:nvPicPr>
-          <p:cNvPr id="4" name="Imagen 3" descr="Icono&#10;&#10;El contenido generado por IA puede ser incorrecto.">
-            <a:extLst>
-              <a:ext uri="{FF2B5EF4-FFF2-40B4-BE49-F238E27FC236}">
-                <a16:creationId xmlns:a16="http://schemas.microsoft.com/office/drawing/2014/main" id="{768D85AC-06F1-D3FA-5E79-A67D511C0DD4}"/>
-              </a:ext>
-            </a:extLst>
-          </p:cNvPr>
-          <p:cNvPicPr>
-            <a:picLocks noChangeAspect="1"/>
-          </p:cNvPicPr>
-          <p:nvPr/>
-        </p:nvPicPr>
-        <p:blipFill>
-          <a:blip r:embed="rId2"/>
-          <a:stretch>
-            <a:fillRect/>
-          </a:stretch>
-        </p:blipFill>
-        <p:spPr>
-          <a:xfrm>
-            <a:off x="7764292" y="108352"/>
-            <a:ext cx="1137067" cy="956207"/>
-          </a:xfrm>
-          <a:prstGeom prst="rect">
-            <a:avLst/>
-          </a:prstGeom>
-        </p:spPr>
-      </p:pic>
-      <p:pic>
-        <p:nvPicPr>
-          <p:cNvPr id="1028" name="Picture 4" descr="Gráfico&#10;&#10;El contenido generado por IA puede ser incorrecto., Imagen">
-            <a:extLst>
-              <a:ext uri="{FF2B5EF4-FFF2-40B4-BE49-F238E27FC236}">
-                <a16:creationId xmlns:a16="http://schemas.microsoft.com/office/drawing/2014/main" id="{5FF214F3-A005-2639-1828-5FF03B40E528}"/>
-              </a:ext>
-            </a:extLst>
-          </p:cNvPr>
-          <p:cNvPicPr>
-            <a:picLocks noChangeAspect="1" noChangeArrowheads="1"/>
-          </p:cNvPicPr>
-          <p:nvPr/>
-        </p:nvPicPr>
-        <p:blipFill>
-          <a:blip r:embed="rId3">
-            <a:extLst>
-              <a:ext uri="{28A0092B-C50C-407E-A947-70E740481C1C}">
-                <a14:useLocalDpi xmlns:a14="http://schemas.microsoft.com/office/drawing/2010/main" val="0"/>
-              </a:ext>
-            </a:extLst>
-          </a:blip>
-          <a:srcRect/>
-          <a:stretch>
-            <a:fillRect/>
-          </a:stretch>
-        </p:blipFill>
-        <p:spPr bwMode="auto">
-          <a:xfrm>
-            <a:off x="242641" y="1746480"/>
-            <a:ext cx="7462060" cy="3569232"/>
-          </a:xfrm>
-          <a:prstGeom prst="rect">
-            <a:avLst/>
-          </a:prstGeom>
-          <a:noFill/>
-          <a:extLst>
-            <a:ext uri="{909E8E84-426E-40DD-AFC4-6F175D3DCCD1}">
-              <a14:hiddenFill xmlns:a14="http://schemas.microsoft.com/office/drawing/2010/main">
-                <a:solidFill>
-                  <a:srgbClr val="FFFFFF"/>
-                </a:solidFill>
-              </a14:hiddenFill>
-            </a:ext>
-          </a:extLst>
-        </p:spPr>
-      </p:pic>
-    </p:spTree>
-    <p:extLst>
-      <p:ext uri="{BB962C8B-B14F-4D97-AF65-F5344CB8AC3E}">
-        <p14:creationId xmlns:p14="http://schemas.microsoft.com/office/powerpoint/2010/main" val="724353042"/>
-      </p:ext>
-    </p:extLst>
-  </p:cSld>
-  <p:clrMapOvr>
-    <a:masterClrMapping/>
-  </p:clrMapOvr>
-</p:sld>
-</file>
-
-<file path=ppt/slides/slide12.xml><?xml version="1.0" encoding="utf-8"?>
-<p:sld xmlns:a="http://schemas.openxmlformats.org/drawingml/2006/main" xmlns:r="http://schemas.openxmlformats.org/officeDocument/2006/relationships" xmlns:p="http://schemas.openxmlformats.org/presentationml/2006/main">
-  <p:cSld>
-    <p:spTree>
-      <p:nvGrpSpPr>
-        <p:cNvPr id="1" name=""/>
-        <p:cNvGrpSpPr/>
-        <p:nvPr/>
-      </p:nvGrpSpPr>
-      <p:grpSpPr>
-        <a:xfrm>
-          <a:off x="0" y="0"/>
-          <a:ext cx="0" cy="0"/>
-          <a:chOff x="0" y="0"/>
-          <a:chExt cx="0" cy="0"/>
-        </a:xfrm>
-      </p:grpSpPr>
-      <p:sp>
-        <p:nvSpPr>
-          <p:cNvPr id="2" name="Title 1"/>
-          <p:cNvSpPr>
-            <a:spLocks noGrp="1"/>
-          </p:cNvSpPr>
-          <p:nvPr>
-            <p:ph type="title"/>
-          </p:nvPr>
-        </p:nvSpPr>
-        <p:spPr/>
-        <p:txBody>
-          <a:bodyPr/>
-          <a:lstStyle/>
-          <a:p>
-            <a:r>
-              <a:t>Sprint Review</a:t>
-            </a:r>
-          </a:p>
-        </p:txBody>
-      </p:sp>
-      <p:sp>
-        <p:nvSpPr>
-          <p:cNvPr id="3" name="Content Placeholder 2"/>
-          <p:cNvSpPr>
-            <a:spLocks noGrp="1"/>
-          </p:cNvSpPr>
-          <p:nvPr>
-            <p:ph idx="1"/>
-          </p:nvPr>
-        </p:nvSpPr>
-        <p:spPr/>
-        <p:txBody>
-          <a:bodyPr/>
-          <a:lstStyle/>
-          <a:p>
-            <a:r>
-              <a:rPr dirty="0" err="1"/>
-              <a:t>Revisión</a:t>
-            </a:r>
-            <a:r>
-              <a:rPr dirty="0"/>
-              <a:t> del backlog</a:t>
-            </a:r>
-          </a:p>
-          <a:p>
-            <a:r>
-              <a:rPr dirty="0" err="1"/>
-              <a:t>Esfuerzo</a:t>
-            </a:r>
-            <a:r>
-              <a:rPr dirty="0"/>
-              <a:t> y </a:t>
-            </a:r>
-            <a:r>
-              <a:rPr dirty="0" err="1"/>
-              <a:t>gráficos</a:t>
-            </a:r>
-            <a:r>
-              <a:rPr dirty="0"/>
-              <a:t> Burn Down / Up</a:t>
-            </a:r>
-            <a:endParaRPr lang="es-419" dirty="0"/>
-          </a:p>
-          <a:p>
-            <a:r>
-              <a:rPr lang="es-MX" dirty="0"/>
-              <a:t>Retrospectiva y plan de mejora</a:t>
-            </a:r>
-          </a:p>
-        </p:txBody>
-      </p:sp>
-      <p:pic>
-        <p:nvPicPr>
-          <p:cNvPr id="4" name="Imagen 3" descr="Icono&#10;&#10;El contenido generado por IA puede ser incorrecto.">
-            <a:extLst>
-              <a:ext uri="{FF2B5EF4-FFF2-40B4-BE49-F238E27FC236}">
-                <a16:creationId xmlns:a16="http://schemas.microsoft.com/office/drawing/2014/main" id="{7E95CBF5-1D15-4771-FB3D-1B072A5907FE}"/>
-              </a:ext>
-            </a:extLst>
-          </p:cNvPr>
-          <p:cNvPicPr>
-            <a:picLocks noChangeAspect="1"/>
-          </p:cNvPicPr>
-          <p:nvPr/>
-        </p:nvPicPr>
-        <p:blipFill>
-          <a:blip r:embed="rId2"/>
-          <a:stretch>
-            <a:fillRect/>
-          </a:stretch>
-        </p:blipFill>
-        <p:spPr>
-          <a:xfrm>
-            <a:off x="7764292" y="108352"/>
-            <a:ext cx="1137067" cy="956207"/>
-          </a:xfrm>
-          <a:prstGeom prst="rect">
-            <a:avLst/>
-          </a:prstGeom>
-        </p:spPr>
-      </p:pic>
-      <p:sp>
-        <p:nvSpPr>
-          <p:cNvPr id="5" name="CuadroTexto 4">
-            <a:extLst>
-              <a:ext uri="{FF2B5EF4-FFF2-40B4-BE49-F238E27FC236}">
-                <a16:creationId xmlns:a16="http://schemas.microsoft.com/office/drawing/2014/main" id="{085B140E-1F3B-D7ED-F545-98149D4F7EE0}"/>
-              </a:ext>
-            </a:extLst>
-          </p:cNvPr>
-          <p:cNvSpPr txBox="1"/>
-          <p:nvPr/>
-        </p:nvSpPr>
-        <p:spPr>
-          <a:xfrm>
-            <a:off x="7693921" y="1064559"/>
-            <a:ext cx="1360046" cy="615553"/>
-          </a:xfrm>
-          <a:prstGeom prst="rect">
-            <a:avLst/>
-          </a:prstGeom>
-          <a:noFill/>
-        </p:spPr>
-        <p:txBody>
-          <a:bodyPr wrap="square" rtlCol="0">
-            <a:spAutoFit/>
-          </a:bodyPr>
-          <a:lstStyle/>
-          <a:p>
-            <a:r>
-              <a:rPr lang="es-CL" sz="800" dirty="0"/>
-              <a:t>Facultad de ingeniería</a:t>
-            </a:r>
-          </a:p>
-          <a:p>
-            <a:r>
-              <a:rPr lang="es-CL" sz="800" dirty="0"/>
-              <a:t>Ingeniería de software I</a:t>
-            </a:r>
-          </a:p>
-          <a:p>
-            <a:endParaRPr lang="es-CL" dirty="0"/>
-          </a:p>
-        </p:txBody>
-      </p:sp>
-    </p:spTree>
-  </p:cSld>
-  <p:clrMapOvr>
-    <a:masterClrMapping/>
-  </p:clrMapOvr>
-</p:sld>
-</file>
-
-<file path=ppt/slides/slide13.xml><?xml version="1.0" encoding="utf-8"?>
 <p:sld xmlns:a="http://schemas.openxmlformats.org/drawingml/2006/main" xmlns:r="http://schemas.openxmlformats.org/officeDocument/2006/relationships" xmlns:p="http://schemas.openxmlformats.org/presentationml/2006/main">
   <p:cSld>
     <p:spTree>
@@ -7506,6 +7040,116 @@
 </p:sld>
 </file>
 
+<file path=ppt/slides/slide11.xml><?xml version="1.0" encoding="utf-8"?>
+<p:sld xmlns:a="http://schemas.openxmlformats.org/drawingml/2006/main" xmlns:r="http://schemas.openxmlformats.org/officeDocument/2006/relationships" xmlns:p="http://schemas.openxmlformats.org/presentationml/2006/main">
+  <p:cSld>
+    <p:spTree>
+      <p:nvGrpSpPr>
+        <p:cNvPr id="1" name=""/>
+        <p:cNvGrpSpPr/>
+        <p:nvPr/>
+      </p:nvGrpSpPr>
+      <p:grpSpPr>
+        <a:xfrm>
+          <a:off x="0" y="0"/>
+          <a:ext cx="0" cy="0"/>
+          <a:chOff x="0" y="0"/>
+          <a:chExt cx="0" cy="0"/>
+        </a:xfrm>
+      </p:grpSpPr>
+      <p:sp>
+        <p:nvSpPr>
+          <p:cNvPr id="2" name="Título 1">
+            <a:extLst>
+              <a:ext uri="{FF2B5EF4-FFF2-40B4-BE49-F238E27FC236}">
+                <a16:creationId xmlns:a16="http://schemas.microsoft.com/office/drawing/2014/main" id="{89FF630E-C5C4-4B7D-BD94-93DEC05632C6}"/>
+              </a:ext>
+            </a:extLst>
+          </p:cNvPr>
+          <p:cNvSpPr>
+            <a:spLocks noGrp="1"/>
+          </p:cNvSpPr>
+          <p:nvPr>
+            <p:ph type="title"/>
+          </p:nvPr>
+        </p:nvSpPr>
+        <p:spPr>
+          <a:xfrm>
+            <a:off x="609599" y="2768600"/>
+            <a:ext cx="7010402" cy="1320800"/>
+          </a:xfrm>
+        </p:spPr>
+        <p:txBody>
+          <a:bodyPr/>
+          <a:lstStyle/>
+          <a:p>
+            <a:r>
+              <a:rPr lang="es-CL" dirty="0"/>
+              <a:t>Muchas gracias por su atención</a:t>
+            </a:r>
+          </a:p>
+        </p:txBody>
+      </p:sp>
+      <p:pic>
+        <p:nvPicPr>
+          <p:cNvPr id="3" name="Picture 2" descr="Eugcom.cl">
+            <a:extLst>
+              <a:ext uri="{FF2B5EF4-FFF2-40B4-BE49-F238E27FC236}">
+                <a16:creationId xmlns:a16="http://schemas.microsoft.com/office/drawing/2014/main" id="{CE361E6D-63F2-415F-99E0-E542F0C8BFE9}"/>
+              </a:ext>
+            </a:extLst>
+          </p:cNvPr>
+          <p:cNvPicPr>
+            <a:picLocks noChangeAspect="1" noChangeArrowheads="1"/>
+          </p:cNvPicPr>
+          <p:nvPr/>
+        </p:nvPicPr>
+        <p:blipFill>
+          <a:blip r:embed="rId2">
+            <a:extLst>
+              <a:ext uri="{28A0092B-C50C-407E-A947-70E740481C1C}">
+                <a14:useLocalDpi xmlns:a14="http://schemas.microsoft.com/office/drawing/2010/main" val="0"/>
+              </a:ext>
+            </a:extLst>
+          </a:blip>
+          <a:srcRect/>
+          <a:stretch>
+            <a:fillRect/>
+          </a:stretch>
+        </p:blipFill>
+        <p:spPr bwMode="auto">
+          <a:xfrm>
+            <a:off x="609599" y="496025"/>
+            <a:ext cx="1137067" cy="1137067"/>
+          </a:xfrm>
+          <a:prstGeom prst="rect">
+            <a:avLst/>
+          </a:prstGeom>
+          <a:noFill/>
+          <a:extLst>
+            <a:ext uri="{909E8E84-426E-40DD-AFC4-6F175D3DCCD1}">
+              <a14:hiddenFill xmlns:a14="http://schemas.microsoft.com/office/drawing/2010/main">
+                <a:solidFill>
+                  <a:srgbClr val="FFFFFF"/>
+                </a:solidFill>
+              </a14:hiddenFill>
+            </a:ext>
+          </a:extLst>
+        </p:spPr>
+      </p:pic>
+    </p:spTree>
+    <p:extLst>
+      <p:ext uri="{BB962C8B-B14F-4D97-AF65-F5344CB8AC3E}">
+        <p14:creationId xmlns:p14="http://schemas.microsoft.com/office/powerpoint/2010/main" val="84908304"/>
+      </p:ext>
+    </p:extLst>
+  </p:cSld>
+  <p:clrMapOvr>
+    <a:masterClrMapping/>
+  </p:clrMapOvr>
+</p:sld>
+</file>
+
 <file path=ppt/slides/slide2.xml><?xml version="1.0" encoding="utf-8"?>
 <p:sld xmlns:a="http://schemas.openxmlformats.org/drawingml/2006/main" xmlns:r="http://schemas.openxmlformats.org/officeDocument/2006/relationships" xmlns:p="http://schemas.openxmlformats.org/presentationml/2006/main">
   <p:cSld>
@@ -7575,12 +7219,8 @@
           <a:lstStyle/>
           <a:p>
             <a:r>
-              <a:rPr lang="es-CL" dirty="0" err="1"/>
-              <a:t>Propueta</a:t>
-            </a:r>
-            <a:r>
               <a:rPr lang="es-CL" dirty="0"/>
-              <a:t> de solución e incremento </a:t>
+              <a:t>Incremento 2 </a:t>
             </a:r>
             <a:r>
               <a:rPr lang="es-CL" dirty="0" err="1"/>
@@ -7593,12 +7233,20 @@
           </a:p>
           <a:p>
             <a:r>
-              <a:rPr lang="es-CL" dirty="0" err="1"/>
-              <a:t>Product</a:t>
-            </a:r>
-            <a:r>
               <a:rPr lang="es-CL" dirty="0"/>
-              <a:t> Backlog </a:t>
+              <a:t>Casos de uso </a:t>
+            </a:r>
+          </a:p>
+          <a:p>
+            <a:r>
+              <a:rPr lang="es-CL" dirty="0"/>
+              <a:t>Diagramas Secuencia</a:t>
+            </a:r>
+          </a:p>
+          <a:p>
+            <a:r>
+              <a:rPr lang="es-CL" dirty="0"/>
+              <a:t>Sprint backlog y casos de uso </a:t>
             </a:r>
             <a:r>
               <a:rPr lang="es-CL" dirty="0" err="1"/>
@@ -7612,7 +7260,7 @@
           <a:p>
             <a:r>
               <a:rPr lang="es-CL" dirty="0"/>
-              <a:t>Spring Backlog – vista externa </a:t>
+              <a:t>Tabla de esfuerzo </a:t>
             </a:r>
             <a:r>
               <a:rPr lang="es-CL" dirty="0" err="1"/>
@@ -7626,7 +7274,13 @@
           <a:p>
             <a:r>
               <a:rPr lang="es-CL" dirty="0"/>
-              <a:t>Sprint vistas </a:t>
+              <a:t>Pruebas Unitarias cap5</a:t>
+            </a:r>
+          </a:p>
+          <a:p>
+            <a:r>
+              <a:rPr lang="es-CL" dirty="0"/>
+              <a:t>Pruebas de sistema </a:t>
             </a:r>
             <a:r>
               <a:rPr lang="es-CL" dirty="0" err="1"/>
@@ -7634,59 +7288,8 @@
             </a:r>
             <a:r>
               <a:rPr lang="es-CL" dirty="0"/>
-              <a:t> 5</a:t>
-            </a:r>
-          </a:p>
-          <a:p>
-            <a:r>
-              <a:rPr lang="es-CL" dirty="0"/>
-              <a:t>Manual de instalación </a:t>
-            </a:r>
-            <a:r>
-              <a:rPr lang="es-CL" dirty="0" err="1"/>
-              <a:t>cap</a:t>
-            </a:r>
-            <a:r>
-              <a:rPr lang="es-CL" dirty="0"/>
-              <a:t> 6</a:t>
-            </a:r>
-          </a:p>
-          <a:p>
-            <a:r>
-              <a:rPr lang="es-CL" dirty="0"/>
-              <a:t>Pruebas de sistema </a:t>
-            </a:r>
-            <a:r>
-              <a:rPr lang="es-CL" dirty="0" err="1"/>
-              <a:t>cap</a:t>
-            </a:r>
-            <a:r>
-              <a:rPr lang="es-CL" dirty="0"/>
               <a:t> 8</a:t>
             </a:r>
-          </a:p>
-          <a:p>
-            <a:r>
-              <a:rPr lang="es-CL" dirty="0"/>
-              <a:t>Sprint </a:t>
-            </a:r>
-            <a:r>
-              <a:rPr lang="es-CL" dirty="0" err="1"/>
-              <a:t>review</a:t>
-            </a:r>
-            <a:r>
-              <a:rPr lang="es-CL" dirty="0"/>
-              <a:t> </a:t>
-            </a:r>
-            <a:r>
-              <a:rPr lang="es-CL" dirty="0" err="1"/>
-              <a:t>cap</a:t>
-            </a:r>
-            <a:r>
-              <a:rPr lang="es-CL" dirty="0"/>
-              <a:t> 9</a:t>
-            </a:r>
-            <a:endParaRPr lang="es-419" dirty="0"/>
           </a:p>
         </p:txBody>
       </p:sp>
@@ -8010,14 +7613,6 @@
 <file path=ppt/slides/slide4.xml><?xml version="1.0" encoding="utf-8"?>
 <p:sld xmlns:a="http://schemas.openxmlformats.org/drawingml/2006/main" xmlns:r="http://schemas.openxmlformats.org/officeDocument/2006/relationships" xmlns:p="http://schemas.openxmlformats.org/presentationml/2006/main">
   <p:cSld>
-    <p:bg>
-      <p:bgPr>
-        <a:solidFill>
-          <a:schemeClr val="bg1"/>
-        </a:solidFill>
-        <a:effectLst/>
-      </p:bgPr>
-    </p:bg>
     <p:spTree>
       <p:nvGrpSpPr>
         <p:cNvPr id="1" name=""/>
@@ -8032,1043 +7627,102 @@
           <a:chExt cx="0" cy="0"/>
         </a:xfrm>
       </p:grpSpPr>
-      <p:sp useBgFill="1">
-        <p:nvSpPr>
-          <p:cNvPr id="3079" name="Rectangle 3078">
-            <a:extLst>
-              <a:ext uri="{FF2B5EF4-FFF2-40B4-BE49-F238E27FC236}">
-                <a16:creationId xmlns:a16="http://schemas.microsoft.com/office/drawing/2014/main" id="{A65AC7D1-EAA9-48F5-B509-60A7F50BF703}"/>
-              </a:ext>
-              <a:ext uri="{C183D7F6-B498-43B3-948B-1728B52AA6E4}">
-                <adec:decorative xmlns:adec="http://schemas.microsoft.com/office/drawing/2017/decorative" val="1"/>
-              </a:ext>
-            </a:extLst>
-          </p:cNvPr>
-          <p:cNvSpPr>
-            <a:spLocks noGrp="1" noRot="1" noChangeAspect="1" noMove="1" noResize="1" noEditPoints="1" noAdjustHandles="1" noChangeArrowheads="1" noChangeShapeType="1" noTextEdit="1"/>
-          </p:cNvSpPr>
-          <p:nvPr>
-            <p:extLst>
-              <p:ext uri="{386F3935-93C4-4BCD-93E2-E3B085C9AB24}">
-                <p16:designElem xmlns:p16="http://schemas.microsoft.com/office/powerpoint/2015/main" val="1"/>
-              </p:ext>
-            </p:extLst>
-          </p:nvPr>
-        </p:nvSpPr>
-        <p:spPr>
-          <a:xfrm>
-            <a:off x="0" y="0"/>
-            <a:ext cx="9144000" cy="6858000"/>
-          </a:xfrm>
-          <a:prstGeom prst="rect">
-            <a:avLst/>
-          </a:prstGeom>
-          <a:ln>
-            <a:noFill/>
-          </a:ln>
-        </p:spPr>
-        <p:style>
-          <a:lnRef idx="2">
-            <a:schemeClr val="accent1">
-              <a:shade val="50000"/>
-            </a:schemeClr>
-          </a:lnRef>
-          <a:fillRef idx="1">
-            <a:schemeClr val="accent1"/>
-          </a:fillRef>
-          <a:effectRef idx="0">
-            <a:schemeClr val="accent1"/>
-          </a:effectRef>
-          <a:fontRef idx="minor">
-            <a:schemeClr val="lt1"/>
-          </a:fontRef>
-        </p:style>
-        <p:txBody>
-          <a:bodyPr rtlCol="0" anchor="ctr"/>
-          <a:lstStyle/>
-          <a:p>
-            <a:pPr algn="ctr"/>
-            <a:endParaRPr lang="en-US" dirty="0"/>
-          </a:p>
-        </p:txBody>
-      </p:sp>
-      <p:sp useBgFill="1">
-        <p:nvSpPr>
-          <p:cNvPr id="3081" name="Rectangle 3080">
-            <a:extLst>
-              <a:ext uri="{FF2B5EF4-FFF2-40B4-BE49-F238E27FC236}">
-                <a16:creationId xmlns:a16="http://schemas.microsoft.com/office/drawing/2014/main" id="{D6320AF9-619A-4175-865B-5663E1AEF4C5}"/>
-              </a:ext>
-              <a:ext uri="{C183D7F6-B498-43B3-948B-1728B52AA6E4}">
-                <adec:decorative xmlns:adec="http://schemas.microsoft.com/office/drawing/2017/decorative" val="1"/>
-              </a:ext>
-            </a:extLst>
-          </p:cNvPr>
-          <p:cNvSpPr>
-            <a:spLocks noGrp="1" noRot="1" noChangeAspect="1" noMove="1" noResize="1" noEditPoints="1" noAdjustHandles="1" noChangeArrowheads="1" noChangeShapeType="1" noTextEdit="1"/>
-          </p:cNvSpPr>
-          <p:nvPr>
-            <p:extLst>
-              <p:ext uri="{386F3935-93C4-4BCD-93E2-E3B085C9AB24}">
-                <p16:designElem xmlns:p16="http://schemas.microsoft.com/office/powerpoint/2015/main" val="1"/>
-              </p:ext>
-            </p:extLst>
-          </p:nvPr>
-        </p:nvSpPr>
-        <p:spPr>
-          <a:xfrm>
-            <a:off x="0" y="0"/>
-            <a:ext cx="9144000" cy="6858000"/>
-          </a:xfrm>
-          <a:prstGeom prst="rect">
-            <a:avLst/>
-          </a:prstGeom>
-          <a:ln>
-            <a:noFill/>
-          </a:ln>
-        </p:spPr>
-        <p:style>
-          <a:lnRef idx="2">
-            <a:schemeClr val="accent1">
-              <a:shade val="50000"/>
-            </a:schemeClr>
-          </a:lnRef>
-          <a:fillRef idx="1">
-            <a:schemeClr val="accent1"/>
-          </a:fillRef>
-          <a:effectRef idx="0">
-            <a:schemeClr val="accent1"/>
-          </a:effectRef>
-          <a:fontRef idx="minor">
-            <a:schemeClr val="lt1"/>
-          </a:fontRef>
-        </p:style>
-        <p:txBody>
-          <a:bodyPr rtlCol="0" anchor="ctr"/>
-          <a:lstStyle/>
-          <a:p>
-            <a:pPr algn="ctr"/>
-            <a:endParaRPr lang="en-US"/>
-          </a:p>
-        </p:txBody>
-      </p:sp>
-      <p:cxnSp>
-        <p:nvCxnSpPr>
-          <p:cNvPr id="3083" name="Straight Connector 3082">
-            <a:extLst>
-              <a:ext uri="{FF2B5EF4-FFF2-40B4-BE49-F238E27FC236}">
-                <a16:creationId xmlns:a16="http://schemas.microsoft.com/office/drawing/2014/main" id="{063B6EC6-D752-4EE7-908B-F8F19E8C7FEA}"/>
-              </a:ext>
-              <a:ext uri="{C183D7F6-B498-43B3-948B-1728B52AA6E4}">
-                <adec:decorative xmlns:adec="http://schemas.microsoft.com/office/drawing/2017/decorative" val="1"/>
-              </a:ext>
-            </a:extLst>
-          </p:cNvPr>
-          <p:cNvCxnSpPr>
-            <a:cxnSpLocks noGrp="1" noRot="1" noChangeAspect="1" noMove="1" noResize="1" noEditPoints="1" noAdjustHandles="1" noChangeArrowheads="1" noChangeShapeType="1"/>
-          </p:cNvCxnSpPr>
-          <p:nvPr>
-            <p:extLst>
-              <p:ext uri="{386F3935-93C4-4BCD-93E2-E3B085C9AB24}">
-                <p16:designElem xmlns:p16="http://schemas.microsoft.com/office/powerpoint/2015/main" val="1"/>
-              </p:ext>
-            </p:extLst>
-          </p:nvPr>
-        </p:nvCxnSpPr>
-        <p:spPr>
-          <a:xfrm>
-            <a:off x="3833484" y="0"/>
-            <a:ext cx="914400" cy="6858000"/>
-          </a:xfrm>
-          <a:prstGeom prst="line">
-            <a:avLst/>
-          </a:prstGeom>
-          <a:ln w="9525">
-            <a:solidFill>
-              <a:schemeClr val="accent1">
-                <a:lumMod val="75000"/>
-              </a:schemeClr>
-            </a:solidFill>
-          </a:ln>
-        </p:spPr>
-        <p:style>
-          <a:lnRef idx="2">
-            <a:schemeClr val="accent1"/>
-          </a:lnRef>
-          <a:fillRef idx="0">
-            <a:schemeClr val="accent1"/>
-          </a:fillRef>
-          <a:effectRef idx="1">
-            <a:schemeClr val="accent1"/>
-          </a:effectRef>
-          <a:fontRef idx="minor">
-            <a:schemeClr val="tx1"/>
-          </a:fontRef>
-        </p:style>
-      </p:cxnSp>
-      <p:cxnSp>
-        <p:nvCxnSpPr>
-          <p:cNvPr id="3085" name="Straight Connector 3084">
-            <a:extLst>
-              <a:ext uri="{FF2B5EF4-FFF2-40B4-BE49-F238E27FC236}">
-                <a16:creationId xmlns:a16="http://schemas.microsoft.com/office/drawing/2014/main" id="{EFECD4E8-AD3E-4228-82A2-9461958EA94D}"/>
-              </a:ext>
-              <a:ext uri="{C183D7F6-B498-43B3-948B-1728B52AA6E4}">
-                <adec:decorative xmlns:adec="http://schemas.microsoft.com/office/drawing/2017/decorative" val="1"/>
-              </a:ext>
-            </a:extLst>
-          </p:cNvPr>
-          <p:cNvCxnSpPr>
-            <a:cxnSpLocks noGrp="1" noRot="1" noChangeAspect="1" noMove="1" noResize="1" noEditPoints="1" noAdjustHandles="1" noChangeArrowheads="1" noChangeShapeType="1"/>
-          </p:cNvCxnSpPr>
-          <p:nvPr>
-            <p:extLst>
-              <p:ext uri="{386F3935-93C4-4BCD-93E2-E3B085C9AB24}">
-                <p16:designElem xmlns:p16="http://schemas.microsoft.com/office/powerpoint/2015/main" val="1"/>
-              </p:ext>
-            </p:extLst>
-          </p:nvPr>
-        </p:nvCxnSpPr>
-        <p:spPr>
-          <a:xfrm flipH="1">
-            <a:off x="2468234" y="3681413"/>
-            <a:ext cx="3572668" cy="3176587"/>
-          </a:xfrm>
-          <a:prstGeom prst="line">
-            <a:avLst/>
-          </a:prstGeom>
-          <a:ln w="9525">
-            <a:solidFill>
-              <a:schemeClr val="tx1">
-                <a:lumMod val="50000"/>
-                <a:lumOff val="50000"/>
-                <a:alpha val="80000"/>
-              </a:schemeClr>
-            </a:solidFill>
-          </a:ln>
-        </p:spPr>
-        <p:style>
-          <a:lnRef idx="2">
-            <a:schemeClr val="accent1"/>
-          </a:lnRef>
-          <a:fillRef idx="0">
-            <a:schemeClr val="accent1"/>
-          </a:fillRef>
-          <a:effectRef idx="1">
-            <a:schemeClr val="accent1"/>
-          </a:effectRef>
-          <a:fontRef idx="minor">
-            <a:schemeClr val="tx1"/>
-          </a:fontRef>
-        </p:style>
-      </p:cxnSp>
-      <p:sp>
-        <p:nvSpPr>
-          <p:cNvPr id="3087" name="Rectangle 23">
-            <a:extLst>
-              <a:ext uri="{FF2B5EF4-FFF2-40B4-BE49-F238E27FC236}">
-                <a16:creationId xmlns:a16="http://schemas.microsoft.com/office/drawing/2014/main" id="{7E018740-5C2B-4A41-AC1A-7E68D1EC1954}"/>
-              </a:ext>
-              <a:ext uri="{C183D7F6-B498-43B3-948B-1728B52AA6E4}">
-                <adec:decorative xmlns:adec="http://schemas.microsoft.com/office/drawing/2017/decorative" val="1"/>
-              </a:ext>
-            </a:extLst>
-          </p:cNvPr>
-          <p:cNvSpPr>
-            <a:spLocks noGrp="1" noRot="1" noChangeAspect="1" noMove="1" noResize="1" noEditPoints="1" noAdjustHandles="1" noChangeArrowheads="1" noChangeShapeType="1" noTextEdit="1"/>
-          </p:cNvSpPr>
-          <p:nvPr>
-            <p:extLst>
-              <p:ext uri="{386F3935-93C4-4BCD-93E2-E3B085C9AB24}">
-                <p16:designElem xmlns:p16="http://schemas.microsoft.com/office/powerpoint/2015/main" val="1"/>
-              </p:ext>
-            </p:extLst>
-          </p:nvPr>
-        </p:nvSpPr>
-        <p:spPr>
-          <a:xfrm>
-            <a:off x="3361926" y="-8467"/>
-            <a:ext cx="2255511" cy="6866467"/>
-          </a:xfrm>
-          <a:custGeom>
-            <a:avLst/>
-            <a:gdLst/>
-            <a:ahLst/>
-            <a:cxnLst/>
-            <a:rect l="l" t="t" r="r" b="b"/>
-            <a:pathLst>
-              <a:path w="3007349" h="6866467">
-                <a:moveTo>
-                  <a:pt x="2045532" y="0"/>
-                </a:moveTo>
-                <a:lnTo>
-                  <a:pt x="3007349" y="0"/>
-                </a:lnTo>
-                <a:lnTo>
-                  <a:pt x="3007349" y="6866467"/>
-                </a:lnTo>
-                <a:lnTo>
-                  <a:pt x="0" y="6866467"/>
-                </a:lnTo>
-                <a:lnTo>
-                  <a:pt x="2045532" y="0"/>
-                </a:lnTo>
-                <a:close/>
-              </a:path>
-            </a:pathLst>
-          </a:custGeom>
-          <a:solidFill>
-            <a:schemeClr val="accent1">
-              <a:alpha val="30000"/>
-            </a:schemeClr>
-          </a:solidFill>
-          <a:ln>
-            <a:noFill/>
-          </a:ln>
-          <a:effectLst/>
-        </p:spPr>
-        <p:style>
-          <a:lnRef idx="1">
-            <a:schemeClr val="accent1"/>
-          </a:lnRef>
-          <a:fillRef idx="3">
-            <a:schemeClr val="accent1"/>
-          </a:fillRef>
-          <a:effectRef idx="2">
-            <a:schemeClr val="accent1"/>
-          </a:effectRef>
-          <a:fontRef idx="minor">
-            <a:schemeClr val="lt1"/>
-          </a:fontRef>
-        </p:style>
+      <p:sp>
+        <p:nvSpPr>
+          <p:cNvPr id="2" name="Title 1"/>
+          <p:cNvSpPr>
+            <a:spLocks noGrp="1"/>
+          </p:cNvSpPr>
+          <p:nvPr>
+            <p:ph type="title"/>
+          </p:nvPr>
+        </p:nvSpPr>
+        <p:spPr/>
         <p:txBody>
           <a:bodyPr/>
           <a:lstStyle/>
           <a:p>
-            <a:endParaRPr lang="es-419"/>
-          </a:p>
-        </p:txBody>
-      </p:sp>
-      <p:sp>
-        <p:nvSpPr>
-          <p:cNvPr id="3089" name="Rectangle 25">
-            <a:extLst>
-              <a:ext uri="{FF2B5EF4-FFF2-40B4-BE49-F238E27FC236}">
-                <a16:creationId xmlns:a16="http://schemas.microsoft.com/office/drawing/2014/main" id="{166F75A4-C475-4941-8EE2-B80A06A2C1BB}"/>
-              </a:ext>
-              <a:ext uri="{C183D7F6-B498-43B3-948B-1728B52AA6E4}">
-                <adec:decorative xmlns:adec="http://schemas.microsoft.com/office/drawing/2017/decorative" val="1"/>
-              </a:ext>
-            </a:extLst>
-          </p:cNvPr>
-          <p:cNvSpPr>
-            <a:spLocks noGrp="1" noRot="1" noChangeAspect="1" noMove="1" noResize="1" noEditPoints="1" noAdjustHandles="1" noChangeArrowheads="1" noChangeShapeType="1" noTextEdit="1"/>
-          </p:cNvSpPr>
-          <p:nvPr>
-            <p:extLst>
-              <p:ext uri="{386F3935-93C4-4BCD-93E2-E3B085C9AB24}">
-                <p16:designElem xmlns:p16="http://schemas.microsoft.com/office/powerpoint/2015/main" val="1"/>
-              </p:ext>
-            </p:extLst>
-          </p:nvPr>
-        </p:nvSpPr>
-        <p:spPr>
-          <a:xfrm>
-            <a:off x="3678400" y="-8467"/>
-            <a:ext cx="1941419" cy="6866467"/>
-          </a:xfrm>
-          <a:custGeom>
-            <a:avLst/>
-            <a:gdLst/>
-            <a:ahLst/>
-            <a:cxnLst/>
-            <a:rect l="l" t="t" r="r" b="b"/>
-            <a:pathLst>
-              <a:path w="2573311" h="6866467">
-                <a:moveTo>
-                  <a:pt x="0" y="0"/>
-                </a:moveTo>
-                <a:lnTo>
-                  <a:pt x="2573311" y="0"/>
-                </a:lnTo>
-                <a:lnTo>
-                  <a:pt x="2573311" y="6866467"/>
-                </a:lnTo>
-                <a:lnTo>
-                  <a:pt x="1202336" y="6866467"/>
-                </a:lnTo>
-                <a:lnTo>
-                  <a:pt x="0" y="0"/>
-                </a:lnTo>
-                <a:close/>
-              </a:path>
-            </a:pathLst>
-          </a:custGeom>
-          <a:solidFill>
-            <a:schemeClr val="accent1">
-              <a:alpha val="20000"/>
-            </a:schemeClr>
-          </a:solidFill>
-          <a:ln>
-            <a:noFill/>
-          </a:ln>
-          <a:effectLst/>
-        </p:spPr>
-        <p:style>
-          <a:lnRef idx="1">
-            <a:schemeClr val="accent1"/>
-          </a:lnRef>
-          <a:fillRef idx="3">
-            <a:schemeClr val="accent1"/>
-          </a:fillRef>
-          <a:effectRef idx="2">
-            <a:schemeClr val="accent1"/>
-          </a:effectRef>
-          <a:fontRef idx="minor">
-            <a:schemeClr val="lt1"/>
-          </a:fontRef>
-        </p:style>
+            <a:r>
+              <a:rPr dirty="0" err="1"/>
+              <a:t>Incremento</a:t>
+            </a:r>
+            <a:r>
+              <a:rPr dirty="0"/>
+              <a:t> </a:t>
+            </a:r>
+            <a:r>
+              <a:rPr lang="es-CL" dirty="0"/>
+              <a:t>2</a:t>
+            </a:r>
+            <a:endParaRPr dirty="0"/>
+          </a:p>
+        </p:txBody>
+      </p:sp>
+      <p:sp>
+        <p:nvSpPr>
+          <p:cNvPr id="3" name="Content Placeholder 2"/>
+          <p:cNvSpPr>
+            <a:spLocks noGrp="1"/>
+          </p:cNvSpPr>
+          <p:nvPr>
+            <p:ph idx="1"/>
+          </p:nvPr>
+        </p:nvSpPr>
+        <p:spPr/>
         <p:txBody>
           <a:bodyPr/>
           <a:lstStyle/>
           <a:p>
-            <a:endParaRPr lang="es-419"/>
-          </a:p>
-        </p:txBody>
-      </p:sp>
-      <p:sp>
-        <p:nvSpPr>
-          <p:cNvPr id="3091" name="Isosceles Triangle 3090">
-            <a:extLst>
-              <a:ext uri="{FF2B5EF4-FFF2-40B4-BE49-F238E27FC236}">
-                <a16:creationId xmlns:a16="http://schemas.microsoft.com/office/drawing/2014/main" id="{A032553A-72E8-4B0D-8405-FF9771C9AF05}"/>
-              </a:ext>
-              <a:ext uri="{C183D7F6-B498-43B3-948B-1728B52AA6E4}">
-                <adec:decorative xmlns:adec="http://schemas.microsoft.com/office/drawing/2017/decorative" val="1"/>
-              </a:ext>
-            </a:extLst>
-          </p:cNvPr>
-          <p:cNvSpPr>
-            <a:spLocks noGrp="1" noRot="1" noChangeAspect="1" noMove="1" noResize="1" noEditPoints="1" noAdjustHandles="1" noChangeArrowheads="1" noChangeShapeType="1" noTextEdit="1"/>
-          </p:cNvSpPr>
-          <p:nvPr>
-            <p:extLst>
-              <p:ext uri="{386F3935-93C4-4BCD-93E2-E3B085C9AB24}">
-                <p16:designElem xmlns:p16="http://schemas.microsoft.com/office/powerpoint/2015/main" val="1"/>
-              </p:ext>
-            </p:extLst>
-          </p:nvPr>
-        </p:nvSpPr>
-        <p:spPr>
-          <a:xfrm>
-            <a:off x="3175068" y="3048000"/>
-            <a:ext cx="2444751" cy="3810000"/>
-          </a:xfrm>
-          <a:prstGeom prst="triangle">
-            <a:avLst>
-              <a:gd name="adj" fmla="val 100000"/>
-            </a:avLst>
-          </a:prstGeom>
-          <a:solidFill>
-            <a:schemeClr val="accent2">
-              <a:alpha val="72000"/>
-            </a:schemeClr>
-          </a:solidFill>
-          <a:ln>
-            <a:noFill/>
-          </a:ln>
-          <a:effectLst/>
-        </p:spPr>
-        <p:style>
-          <a:lnRef idx="1">
-            <a:schemeClr val="accent1"/>
-          </a:lnRef>
-          <a:fillRef idx="3">
-            <a:schemeClr val="accent1"/>
-          </a:fillRef>
-          <a:effectRef idx="2">
-            <a:schemeClr val="accent1"/>
-          </a:effectRef>
-          <a:fontRef idx="minor">
-            <a:schemeClr val="lt1"/>
-          </a:fontRef>
-        </p:style>
-        <p:txBody>
-          <a:bodyPr/>
-          <a:lstStyle/>
-          <a:p>
-            <a:endParaRPr lang="es-419"/>
-          </a:p>
-        </p:txBody>
-      </p:sp>
-      <p:sp>
-        <p:nvSpPr>
-          <p:cNvPr id="3093" name="Rectangle 27">
-            <a:extLst>
-              <a:ext uri="{FF2B5EF4-FFF2-40B4-BE49-F238E27FC236}">
-                <a16:creationId xmlns:a16="http://schemas.microsoft.com/office/drawing/2014/main" id="{765800AC-C3B9-498E-87BC-29FAE4C76B21}"/>
-              </a:ext>
-              <a:ext uri="{C183D7F6-B498-43B3-948B-1728B52AA6E4}">
-                <adec:decorative xmlns:adec="http://schemas.microsoft.com/office/drawing/2017/decorative" val="1"/>
-              </a:ext>
-            </a:extLst>
-          </p:cNvPr>
-          <p:cNvSpPr>
-            <a:spLocks noGrp="1" noRot="1" noChangeAspect="1" noMove="1" noResize="1" noEditPoints="1" noAdjustHandles="1" noChangeArrowheads="1" noChangeShapeType="1" noTextEdit="1"/>
-          </p:cNvSpPr>
-          <p:nvPr>
-            <p:extLst>
-              <p:ext uri="{386F3935-93C4-4BCD-93E2-E3B085C9AB24}">
-                <p16:designElem xmlns:p16="http://schemas.microsoft.com/office/powerpoint/2015/main" val="1"/>
-              </p:ext>
-            </p:extLst>
-          </p:nvPr>
-        </p:nvSpPr>
-        <p:spPr>
-          <a:xfrm>
-            <a:off x="3476694" y="-8467"/>
-            <a:ext cx="2140744" cy="6866467"/>
-          </a:xfrm>
-          <a:custGeom>
-            <a:avLst/>
-            <a:gdLst/>
-            <a:ahLst/>
-            <a:cxnLst/>
-            <a:rect l="l" t="t" r="r" b="b"/>
-            <a:pathLst>
-              <a:path w="2858013" h="6866467">
-                <a:moveTo>
-                  <a:pt x="0" y="0"/>
-                </a:moveTo>
-                <a:lnTo>
-                  <a:pt x="2858013" y="0"/>
-                </a:lnTo>
-                <a:lnTo>
-                  <a:pt x="2858013" y="6866467"/>
-                </a:lnTo>
-                <a:lnTo>
-                  <a:pt x="2473942" y="6866467"/>
-                </a:lnTo>
-                <a:lnTo>
-                  <a:pt x="0" y="0"/>
-                </a:lnTo>
-                <a:close/>
-              </a:path>
-            </a:pathLst>
-          </a:custGeom>
-          <a:solidFill>
-            <a:schemeClr val="accent2">
-              <a:lumMod val="75000"/>
-              <a:alpha val="70000"/>
-            </a:schemeClr>
-          </a:solidFill>
-          <a:ln>
-            <a:noFill/>
-          </a:ln>
-          <a:effectLst/>
-        </p:spPr>
-        <p:style>
-          <a:lnRef idx="1">
-            <a:schemeClr val="accent1"/>
-          </a:lnRef>
-          <a:fillRef idx="3">
-            <a:schemeClr val="accent1"/>
-          </a:fillRef>
-          <a:effectRef idx="2">
-            <a:schemeClr val="accent1"/>
-          </a:effectRef>
-          <a:fontRef idx="minor">
-            <a:schemeClr val="lt1"/>
-          </a:fontRef>
-        </p:style>
-        <p:txBody>
-          <a:bodyPr/>
-          <a:lstStyle/>
-          <a:p>
-            <a:endParaRPr lang="es-419"/>
-          </a:p>
-        </p:txBody>
-      </p:sp>
-      <p:sp>
-        <p:nvSpPr>
-          <p:cNvPr id="3095" name="Isosceles Triangle 3094">
-            <a:extLst>
-              <a:ext uri="{FF2B5EF4-FFF2-40B4-BE49-F238E27FC236}">
-                <a16:creationId xmlns:a16="http://schemas.microsoft.com/office/drawing/2014/main" id="{1F9D6ACB-2FF4-49F9-978A-E0D5327FC635}"/>
-              </a:ext>
-              <a:ext uri="{C183D7F6-B498-43B3-948B-1728B52AA6E4}">
-                <adec:decorative xmlns:adec="http://schemas.microsoft.com/office/drawing/2017/decorative" val="1"/>
-              </a:ext>
-            </a:extLst>
-          </p:cNvPr>
-          <p:cNvSpPr>
-            <a:spLocks noGrp="1" noRot="1" noChangeAspect="1" noMove="1" noResize="1" noEditPoints="1" noAdjustHandles="1" noChangeArrowheads="1" noChangeShapeType="1" noTextEdit="1"/>
-          </p:cNvSpPr>
-          <p:nvPr>
-            <p:extLst>
-              <p:ext uri="{386F3935-93C4-4BCD-93E2-E3B085C9AB24}">
-                <p16:designElem xmlns:p16="http://schemas.microsoft.com/office/powerpoint/2015/main" val="1"/>
-              </p:ext>
-            </p:extLst>
-          </p:nvPr>
-        </p:nvSpPr>
-        <p:spPr>
-          <a:xfrm>
-            <a:off x="4254568" y="3589867"/>
-            <a:ext cx="1362869" cy="3268133"/>
-          </a:xfrm>
-          <a:prstGeom prst="triangle">
-            <a:avLst>
-              <a:gd name="adj" fmla="val 100000"/>
-            </a:avLst>
-          </a:prstGeom>
-          <a:solidFill>
-            <a:schemeClr val="accent1">
-              <a:alpha val="80000"/>
-            </a:schemeClr>
-          </a:solidFill>
-          <a:ln>
-            <a:noFill/>
-          </a:ln>
-          <a:effectLst/>
-        </p:spPr>
-        <p:style>
-          <a:lnRef idx="1">
-            <a:schemeClr val="accent1"/>
-          </a:lnRef>
-          <a:fillRef idx="3">
-            <a:schemeClr val="accent1"/>
-          </a:fillRef>
-          <a:effectRef idx="2">
-            <a:schemeClr val="accent1"/>
-          </a:effectRef>
-          <a:fontRef idx="minor">
-            <a:schemeClr val="lt1"/>
-          </a:fontRef>
-        </p:style>
-        <p:txBody>
-          <a:bodyPr/>
-          <a:lstStyle/>
-          <a:p>
-            <a:endParaRPr lang="es-419"/>
-          </a:p>
-        </p:txBody>
-      </p:sp>
-      <p:sp>
-        <p:nvSpPr>
-          <p:cNvPr id="3097" name="Freeform: Shape 3096">
-            <a:extLst>
-              <a:ext uri="{FF2B5EF4-FFF2-40B4-BE49-F238E27FC236}">
-                <a16:creationId xmlns:a16="http://schemas.microsoft.com/office/drawing/2014/main" id="{A5EC319D-0FEA-4B95-A3EA-01E35672C95B}"/>
-              </a:ext>
-              <a:ext uri="{C183D7F6-B498-43B3-948B-1728B52AA6E4}">
-                <adec:decorative xmlns:adec="http://schemas.microsoft.com/office/drawing/2017/decorative" val="1"/>
-              </a:ext>
-            </a:extLst>
-          </p:cNvPr>
-          <p:cNvSpPr>
-            <a:spLocks noGrp="1" noRot="1" noChangeAspect="1" noMove="1" noResize="1" noEditPoints="1" noAdjustHandles="1" noChangeArrowheads="1" noChangeShapeType="1" noTextEdit="1"/>
-          </p:cNvSpPr>
-          <p:nvPr>
-            <p:extLst>
-              <p:ext uri="{386F3935-93C4-4BCD-93E2-E3B085C9AB24}">
-                <p16:designElem xmlns:p16="http://schemas.microsoft.com/office/powerpoint/2015/main" val="1"/>
-              </p:ext>
-            </p:extLst>
-          </p:nvPr>
-        </p:nvSpPr>
-        <p:spPr>
-          <a:xfrm>
-            <a:off x="4648223" y="-8467"/>
-            <a:ext cx="4495777" cy="6866467"/>
-          </a:xfrm>
-          <a:custGeom>
-            <a:avLst/>
-            <a:gdLst>
-              <a:gd name="connsiteX0" fmla="*/ 0 w 5994369"/>
-              <a:gd name="connsiteY0" fmla="*/ 0 h 6866467"/>
-              <a:gd name="connsiteX1" fmla="*/ 1249825 w 5994369"/>
-              <a:gd name="connsiteY1" fmla="*/ 0 h 6866467"/>
-              <a:gd name="connsiteX2" fmla="*/ 1249825 w 5994369"/>
-              <a:gd name="connsiteY2" fmla="*/ 8467 h 6866467"/>
-              <a:gd name="connsiteX3" fmla="*/ 5994369 w 5994369"/>
-              <a:gd name="connsiteY3" fmla="*/ 8467 h 6866467"/>
-              <a:gd name="connsiteX4" fmla="*/ 5994369 w 5994369"/>
-              <a:gd name="connsiteY4" fmla="*/ 6866467 h 6866467"/>
-              <a:gd name="connsiteX5" fmla="*/ 1249825 w 5994369"/>
-              <a:gd name="connsiteY5" fmla="*/ 6866467 h 6866467"/>
-              <a:gd name="connsiteX6" fmla="*/ 1109382 w 5994369"/>
-              <a:gd name="connsiteY6" fmla="*/ 6866467 h 6866467"/>
-            </a:gdLst>
-            <a:ahLst/>
-            <a:cxnLst>
-              <a:cxn ang="0">
-                <a:pos x="connsiteX0" y="connsiteY0"/>
-              </a:cxn>
-              <a:cxn ang="0">
-                <a:pos x="connsiteX1" y="connsiteY1"/>
-              </a:cxn>
-              <a:cxn ang="0">
-                <a:pos x="connsiteX2" y="connsiteY2"/>
-              </a:cxn>
-              <a:cxn ang="0">
-                <a:pos x="connsiteX3" y="connsiteY3"/>
-              </a:cxn>
-              <a:cxn ang="0">
-                <a:pos x="connsiteX4" y="connsiteY4"/>
-              </a:cxn>
-              <a:cxn ang="0">
-                <a:pos x="connsiteX5" y="connsiteY5"/>
-              </a:cxn>
-              <a:cxn ang="0">
-                <a:pos x="connsiteX6" y="connsiteY6"/>
-              </a:cxn>
-            </a:cxnLst>
-            <a:rect l="l" t="t" r="r" b="b"/>
-            <a:pathLst>
-              <a:path w="5994369" h="6866467">
-                <a:moveTo>
-                  <a:pt x="0" y="0"/>
-                </a:moveTo>
-                <a:lnTo>
-                  <a:pt x="1249825" y="0"/>
-                </a:lnTo>
-                <a:lnTo>
-                  <a:pt x="1249825" y="8467"/>
-                </a:lnTo>
-                <a:lnTo>
-                  <a:pt x="5994369" y="8467"/>
-                </a:lnTo>
-                <a:lnTo>
-                  <a:pt x="5994369" y="6866467"/>
-                </a:lnTo>
-                <a:lnTo>
-                  <a:pt x="1249825" y="6866467"/>
-                </a:lnTo>
-                <a:lnTo>
-                  <a:pt x="1109382" y="6866467"/>
-                </a:lnTo>
-                <a:close/>
-              </a:path>
-            </a:pathLst>
-          </a:custGeom>
-          <a:solidFill>
-            <a:schemeClr val="accent2">
-              <a:lumMod val="75000"/>
-            </a:schemeClr>
-          </a:solidFill>
-          <a:ln>
-            <a:noFill/>
-          </a:ln>
-        </p:spPr>
-        <p:style>
-          <a:lnRef idx="2">
-            <a:schemeClr val="accent1">
-              <a:shade val="50000"/>
-            </a:schemeClr>
-          </a:lnRef>
-          <a:fillRef idx="1">
-            <a:schemeClr val="accent1"/>
-          </a:fillRef>
-          <a:effectRef idx="0">
-            <a:schemeClr val="accent1"/>
-          </a:effectRef>
-          <a:fontRef idx="minor">
-            <a:schemeClr val="lt1"/>
-          </a:fontRef>
-        </p:style>
-        <p:txBody>
-          <a:bodyPr wrap="square" rtlCol="0" anchor="ctr">
-            <a:noAutofit/>
-          </a:bodyPr>
-          <a:lstStyle/>
-          <a:p>
-            <a:pPr algn="ctr"/>
-            <a:endParaRPr lang="en-US"/>
-          </a:p>
-        </p:txBody>
-      </p:sp>
-      <p:sp>
-        <p:nvSpPr>
-          <p:cNvPr id="2" name="Title 1"/>
-          <p:cNvSpPr>
-            <a:spLocks noGrp="1"/>
-          </p:cNvSpPr>
-          <p:nvPr>
-            <p:ph type="title"/>
-          </p:nvPr>
-        </p:nvSpPr>
-        <p:spPr>
-          <a:xfrm>
-            <a:off x="5103938" y="747902"/>
-            <a:ext cx="3384742" cy="2227730"/>
-          </a:xfrm>
-        </p:spPr>
-        <p:txBody>
-          <a:bodyPr anchor="ctr">
-            <a:normAutofit/>
-          </a:bodyPr>
-          <a:lstStyle/>
-          <a:p>
-            <a:r>
-              <a:rPr lang="es-419" dirty="0">
-                <a:solidFill>
-                  <a:srgbClr val="FFFFFF"/>
-                </a:solidFill>
-              </a:rPr>
-              <a:t>Arquitectura y Tecnologías</a:t>
-            </a:r>
-          </a:p>
-        </p:txBody>
-      </p:sp>
-      <p:pic>
-        <p:nvPicPr>
-          <p:cNvPr id="3074" name="Picture 2" descr="Eugcom.cl">
-            <a:extLst>
-              <a:ext uri="{FF2B5EF4-FFF2-40B4-BE49-F238E27FC236}">
-                <a16:creationId xmlns:a16="http://schemas.microsoft.com/office/drawing/2014/main" id="{1FCDACF4-9DE4-54CC-3E91-330CC3CFBF25}"/>
-              </a:ext>
-            </a:extLst>
-          </p:cNvPr>
-          <p:cNvPicPr>
-            <a:picLocks noChangeAspect="1" noChangeArrowheads="1"/>
-          </p:cNvPicPr>
-          <p:nvPr/>
-        </p:nvPicPr>
-        <p:blipFill>
-          <a:blip r:embed="rId2">
-            <a:extLst>
-              <a:ext uri="{28A0092B-C50C-407E-A947-70E740481C1C}">
-                <a14:useLocalDpi xmlns:a14="http://schemas.microsoft.com/office/drawing/2010/main" val="0"/>
-              </a:ext>
-            </a:extLst>
-          </a:blip>
-          <a:stretch>
-            <a:fillRect/>
-          </a:stretch>
-        </p:blipFill>
-        <p:spPr bwMode="auto">
-          <a:xfrm>
-            <a:off x="567938" y="2027159"/>
-            <a:ext cx="2892580" cy="2892580"/>
-          </a:xfrm>
-          <a:prstGeom prst="rect">
-            <a:avLst/>
-          </a:prstGeom>
-          <a:noFill/>
-          <a:extLst>
-            <a:ext uri="{909E8E84-426E-40DD-AFC4-6F175D3DCCD1}">
-              <a14:hiddenFill xmlns:a14="http://schemas.microsoft.com/office/drawing/2010/main">
-                <a:solidFill>
-                  <a:srgbClr val="FFFFFF"/>
-                </a:solidFill>
-              </a14:hiddenFill>
-            </a:ext>
-          </a:extLst>
-        </p:spPr>
-      </p:pic>
-      <p:sp>
-        <p:nvSpPr>
-          <p:cNvPr id="3" name="Content Placeholder 2"/>
-          <p:cNvSpPr>
-            <a:spLocks noGrp="1"/>
-          </p:cNvSpPr>
-          <p:nvPr>
-            <p:ph idx="1"/>
-          </p:nvPr>
-        </p:nvSpPr>
-        <p:spPr>
-          <a:xfrm>
-            <a:off x="5386293" y="2837329"/>
-            <a:ext cx="3384741" cy="3317938"/>
-          </a:xfrm>
-        </p:spPr>
-        <p:txBody>
-          <a:bodyPr anchor="t">
-            <a:normAutofit/>
-          </a:bodyPr>
-          <a:lstStyle/>
-          <a:p>
-            <a:r>
-              <a:rPr lang="es-419">
-                <a:solidFill>
-                  <a:srgbClr val="FFFFFF"/>
-                </a:solidFill>
-              </a:rPr>
-              <a:t>Cliente-Servidor en capas</a:t>
-            </a:r>
-          </a:p>
-          <a:p>
-            <a:r>
-              <a:rPr lang="es-419">
-                <a:solidFill>
-                  <a:srgbClr val="FFFFFF"/>
-                </a:solidFill>
-              </a:rPr>
-              <a:t>Backend: PHP 7.4, MySQL/MariaDB, Apache</a:t>
-            </a:r>
-          </a:p>
-          <a:p>
-            <a:r>
-              <a:rPr lang="es-419">
-                <a:solidFill>
-                  <a:srgbClr val="FFFFFF"/>
-                </a:solidFill>
-              </a:rPr>
-              <a:t>Frontend: HTML, CSS, JS, Bootstrap</a:t>
-            </a:r>
-          </a:p>
-        </p:txBody>
-      </p:sp>
-      <p:pic>
-        <p:nvPicPr>
-          <p:cNvPr id="4" name="Imagen 3" descr="Icono&#10;&#10;El contenido generado por IA puede ser incorrecto.">
-            <a:extLst>
-              <a:ext uri="{FF2B5EF4-FFF2-40B4-BE49-F238E27FC236}">
-                <a16:creationId xmlns:a16="http://schemas.microsoft.com/office/drawing/2014/main" id="{90126ADB-2F42-1B24-FFC7-F28454A454FD}"/>
-              </a:ext>
-            </a:extLst>
-          </p:cNvPr>
-          <p:cNvPicPr>
-            <a:picLocks noChangeAspect="1"/>
-          </p:cNvPicPr>
-          <p:nvPr/>
-        </p:nvPicPr>
-        <p:blipFill>
-          <a:blip r:embed="rId3"/>
-          <a:stretch>
-            <a:fillRect/>
-          </a:stretch>
-        </p:blipFill>
-        <p:spPr>
-          <a:xfrm>
-            <a:off x="7764292" y="108352"/>
-            <a:ext cx="1137067" cy="956207"/>
-          </a:xfrm>
-          <a:prstGeom prst="rect">
-            <a:avLst/>
-          </a:prstGeom>
-        </p:spPr>
-      </p:pic>
-      <p:sp>
-        <p:nvSpPr>
-          <p:cNvPr id="5" name="CuadroTexto 4">
-            <a:extLst>
-              <a:ext uri="{FF2B5EF4-FFF2-40B4-BE49-F238E27FC236}">
-                <a16:creationId xmlns:a16="http://schemas.microsoft.com/office/drawing/2014/main" id="{BD5D5C14-F4B4-60CA-B59D-EB1285040D20}"/>
-              </a:ext>
-            </a:extLst>
-          </p:cNvPr>
-          <p:cNvSpPr txBox="1"/>
-          <p:nvPr/>
-        </p:nvSpPr>
-        <p:spPr>
-          <a:xfrm>
-            <a:off x="7693921" y="1064559"/>
-            <a:ext cx="1360046" cy="615553"/>
-          </a:xfrm>
-          <a:prstGeom prst="rect">
-            <a:avLst/>
-          </a:prstGeom>
-          <a:noFill/>
-        </p:spPr>
-        <p:txBody>
-          <a:bodyPr wrap="square" rtlCol="0">
-            <a:spAutoFit/>
-          </a:bodyPr>
-          <a:lstStyle/>
-          <a:p>
-            <a:r>
-              <a:rPr lang="es-CL" sz="800" dirty="0"/>
-              <a:t>Facultad de ingeniería</a:t>
-            </a:r>
-          </a:p>
-          <a:p>
-            <a:r>
-              <a:rPr lang="es-CL" sz="800" dirty="0"/>
-              <a:t>Ingeniería de software I</a:t>
-            </a:r>
-          </a:p>
-          <a:p>
-            <a:endParaRPr lang="es-CL" dirty="0"/>
-          </a:p>
-        </p:txBody>
-      </p:sp>
-    </p:spTree>
-  </p:cSld>
-  <p:clrMapOvr>
-    <a:masterClrMapping/>
-  </p:clrMapOvr>
-</p:sld>
-</file>
-
-<file path=ppt/slides/slide5.xml><?xml version="1.0" encoding="utf-8"?>
-<p:sld xmlns:a="http://schemas.openxmlformats.org/drawingml/2006/main" xmlns:r="http://schemas.openxmlformats.org/officeDocument/2006/relationships" xmlns:p="http://schemas.openxmlformats.org/presentationml/2006/main">
-  <p:cSld>
-    <p:spTree>
-      <p:nvGrpSpPr>
-        <p:cNvPr id="1" name=""/>
-        <p:cNvGrpSpPr/>
-        <p:nvPr/>
-      </p:nvGrpSpPr>
-      <p:grpSpPr>
-        <a:xfrm>
-          <a:off x="0" y="0"/>
-          <a:ext cx="0" cy="0"/>
-          <a:chOff x="0" y="0"/>
-          <a:chExt cx="0" cy="0"/>
-        </a:xfrm>
-      </p:grpSpPr>
-      <p:sp>
-        <p:nvSpPr>
-          <p:cNvPr id="2" name="Title 1"/>
-          <p:cNvSpPr>
-            <a:spLocks noGrp="1"/>
-          </p:cNvSpPr>
-          <p:nvPr>
-            <p:ph type="title"/>
-          </p:nvPr>
-        </p:nvSpPr>
-        <p:spPr/>
-        <p:txBody>
-          <a:bodyPr/>
-          <a:lstStyle/>
-          <a:p>
+            <a:r>
+              <a:rPr lang="es-CL" dirty="0"/>
+              <a:t>45</a:t>
+            </a:r>
+            <a:r>
+              <a:rPr dirty="0"/>
+              <a:t> Casos de us</a:t>
+            </a:r>
+            <a:r>
+              <a:rPr lang="es-CL" dirty="0"/>
+              <a:t>o</a:t>
+            </a:r>
+            <a:r>
+              <a:rPr dirty="0"/>
+              <a:t> implement</a:t>
+            </a:r>
+            <a:r>
+              <a:rPr lang="es-CL" dirty="0"/>
+              <a:t>ados</a:t>
+            </a:r>
+            <a:endParaRPr dirty="0"/>
+          </a:p>
+          <a:p>
+            <a:r>
+              <a:rPr dirty="0"/>
+              <a:t>Co</a:t>
+            </a:r>
+            <a:r>
+              <a:rPr lang="es-CL" dirty="0"/>
+              <a:t>b</a:t>
+            </a:r>
             <a:r>
               <a:rPr dirty="0" err="1"/>
-              <a:t>Incremento</a:t>
+              <a:t>ertur</a:t>
+            </a:r>
+            <a:r>
+              <a:rPr lang="es-CL" dirty="0"/>
+              <a:t>a</a:t>
             </a:r>
             <a:r>
               <a:rPr dirty="0"/>
-              <a:t> 1</a:t>
-            </a:r>
-          </a:p>
-        </p:txBody>
-      </p:sp>
-      <p:sp>
-        <p:nvSpPr>
-          <p:cNvPr id="3" name="Content Placeholder 2"/>
-          <p:cNvSpPr>
-            <a:spLocks noGrp="1"/>
-          </p:cNvSpPr>
-          <p:nvPr>
-            <p:ph idx="1"/>
-          </p:nvPr>
-        </p:nvSpPr>
-        <p:spPr/>
-        <p:txBody>
-          <a:bodyPr/>
-          <a:lstStyle/>
-          <a:p>
+              <a:t>: </a:t>
+            </a:r>
+            <a:r>
+              <a:rPr lang="es-CL" dirty="0"/>
+              <a:t>93</a:t>
+            </a:r>
             <a:r>
               <a:rPr dirty="0"/>
-              <a:t>15 Casos de use implementors</a:t>
-            </a:r>
-          </a:p>
-          <a:p>
-            <a:r>
-              <a:rPr dirty="0"/>
-              <a:t>Coverture: 23% del total</a:t>
+              <a:t>% del total</a:t>
             </a:r>
           </a:p>
         </p:txBody>
@@ -9202,6 +7856,94 @@
 </p:sld>
 </file>
 
+<file path=ppt/slides/slide5.xml><?xml version="1.0" encoding="utf-8"?>
+<p:sld xmlns:a="http://schemas.openxmlformats.org/drawingml/2006/main" xmlns:r="http://schemas.openxmlformats.org/officeDocument/2006/relationships" xmlns:p="http://schemas.openxmlformats.org/presentationml/2006/main">
+  <p:cSld>
+    <p:spTree>
+      <p:nvGrpSpPr>
+        <p:cNvPr id="1" name=""/>
+        <p:cNvGrpSpPr/>
+        <p:nvPr/>
+      </p:nvGrpSpPr>
+      <p:grpSpPr>
+        <a:xfrm>
+          <a:off x="0" y="0"/>
+          <a:ext cx="0" cy="0"/>
+          <a:chOff x="0" y="0"/>
+          <a:chExt cx="0" cy="0"/>
+        </a:xfrm>
+      </p:grpSpPr>
+      <p:sp>
+        <p:nvSpPr>
+          <p:cNvPr id="2" name="Título 1">
+            <a:extLst>
+              <a:ext uri="{FF2B5EF4-FFF2-40B4-BE49-F238E27FC236}">
+                <a16:creationId xmlns:a16="http://schemas.microsoft.com/office/drawing/2014/main" id="{42D6B30E-CF24-4AD5-8A2B-CF35257C303D}"/>
+              </a:ext>
+            </a:extLst>
+          </p:cNvPr>
+          <p:cNvSpPr>
+            <a:spLocks noGrp="1"/>
+          </p:cNvSpPr>
+          <p:nvPr>
+            <p:ph type="title"/>
+          </p:nvPr>
+        </p:nvSpPr>
+        <p:spPr/>
+        <p:txBody>
+          <a:bodyPr/>
+          <a:lstStyle/>
+          <a:p>
+            <a:r>
+              <a:rPr lang="es-CL" dirty="0"/>
+              <a:t>Casos de uso </a:t>
+            </a:r>
+          </a:p>
+        </p:txBody>
+      </p:sp>
+      <p:pic>
+        <p:nvPicPr>
+          <p:cNvPr id="14" name="Imagen 13">
+            <a:extLst>
+              <a:ext uri="{FF2B5EF4-FFF2-40B4-BE49-F238E27FC236}">
+                <a16:creationId xmlns:a16="http://schemas.microsoft.com/office/drawing/2014/main" id="{48DB30DB-ADED-4494-AF48-F3443045BC86}"/>
+              </a:ext>
+            </a:extLst>
+          </p:cNvPr>
+          <p:cNvPicPr>
+            <a:picLocks noChangeAspect="1"/>
+          </p:cNvPicPr>
+          <p:nvPr/>
+        </p:nvPicPr>
+        <p:blipFill>
+          <a:blip r:embed="rId2"/>
+          <a:stretch>
+            <a:fillRect/>
+          </a:stretch>
+        </p:blipFill>
+        <p:spPr>
+          <a:xfrm>
+            <a:off x="1249898" y="1685365"/>
+            <a:ext cx="5437774" cy="4078941"/>
+          </a:xfrm>
+          <a:prstGeom prst="rect">
+            <a:avLst/>
+          </a:prstGeom>
+        </p:spPr>
+      </p:pic>
+    </p:spTree>
+    <p:extLst>
+      <p:ext uri="{BB962C8B-B14F-4D97-AF65-F5344CB8AC3E}">
+        <p14:creationId xmlns:p14="http://schemas.microsoft.com/office/powerpoint/2010/main" val="3175595360"/>
+      </p:ext>
+    </p:extLst>
+  </p:cSld>
+  <p:clrMapOvr>
+    <a:masterClrMapping/>
+  </p:clrMapOvr>
+</p:sld>
+</file>
+
 <file path=ppt/slides/slide6.xml><?xml version="1.0" encoding="utf-8"?>
 <p:sld xmlns:a="http://schemas.openxmlformats.org/drawingml/2006/main" xmlns:r="http://schemas.openxmlformats.org/officeDocument/2006/relationships" xmlns:p="http://schemas.openxmlformats.org/presentationml/2006/main">
   <p:cSld>
@@ -9221,109 +7963,38 @@
       </p:grpSpPr>
       <p:sp>
         <p:nvSpPr>
-          <p:cNvPr id="2" name="Title 1"/>
-          <p:cNvSpPr>
-            <a:spLocks noGrp="1"/>
-          </p:cNvSpPr>
-          <p:nvPr>
-            <p:ph type="title"/>
-          </p:nvPr>
-        </p:nvSpPr>
-        <p:spPr/>
-        <p:txBody>
-          <a:bodyPr/>
-          <a:lstStyle/>
-          <a:p>
-            <a:r>
-              <a:t>Product Backlog</a:t>
-            </a:r>
-          </a:p>
-        </p:txBody>
-      </p:sp>
-      <p:sp>
-        <p:nvSpPr>
-          <p:cNvPr id="3" name="Content Placeholder 2"/>
-          <p:cNvSpPr>
-            <a:spLocks noGrp="1"/>
-          </p:cNvSpPr>
-          <p:nvPr>
-            <p:ph idx="1"/>
-          </p:nvPr>
-        </p:nvSpPr>
-        <p:spPr/>
-        <p:txBody>
-          <a:bodyPr/>
-          <a:lstStyle/>
-          <a:p>
-            <a:r>
-              <a:t>Requerimientos priorizados</a:t>
-            </a:r>
-          </a:p>
-          <a:p>
-            <a:r>
-              <a:t>Historias de usuario con prioridad y esfuerzo</a:t>
-            </a:r>
-          </a:p>
-          <a:p>
-            <a:r>
-              <a:t>Todos los casos completados</a:t>
-            </a:r>
-          </a:p>
-        </p:txBody>
-      </p:sp>
-      <p:pic>
-        <p:nvPicPr>
-          <p:cNvPr id="4098" name="Picture 2" descr="Eugcom.cl">
+          <p:cNvPr id="2" name="Título 1">
             <a:extLst>
               <a:ext uri="{FF2B5EF4-FFF2-40B4-BE49-F238E27FC236}">
-                <a16:creationId xmlns:a16="http://schemas.microsoft.com/office/drawing/2014/main" id="{24113999-E8D1-2823-83E5-88CD888A4748}"/>
+                <a16:creationId xmlns:a16="http://schemas.microsoft.com/office/drawing/2014/main" id="{8F45BA60-3D89-444B-B3F1-D90FC5798A47}"/>
               </a:ext>
             </a:extLst>
           </p:cNvPr>
-          <p:cNvPicPr>
-            <a:picLocks noChangeAspect="1" noChangeArrowheads="1"/>
-          </p:cNvPicPr>
-          <p:nvPr/>
-        </p:nvPicPr>
-        <p:blipFill>
-          <a:blip r:embed="rId2">
-            <a:extLst>
-              <a:ext uri="{28A0092B-C50C-407E-A947-70E740481C1C}">
-                <a14:useLocalDpi xmlns:a14="http://schemas.microsoft.com/office/drawing/2010/main" val="0"/>
-              </a:ext>
-            </a:extLst>
-          </a:blip>
-          <a:srcRect/>
-          <a:stretch>
-            <a:fillRect/>
-          </a:stretch>
-        </p:blipFill>
-        <p:spPr bwMode="auto">
-          <a:xfrm>
-            <a:off x="5969889" y="2303145"/>
-            <a:ext cx="1428750" cy="1428750"/>
-          </a:xfrm>
-          <a:prstGeom prst="rect">
-            <a:avLst/>
-          </a:prstGeom>
-          <a:noFill/>
-          <a:extLst>
-            <a:ext uri="{909E8E84-426E-40DD-AFC4-6F175D3DCCD1}">
-              <a14:hiddenFill xmlns:a14="http://schemas.microsoft.com/office/drawing/2010/main">
-                <a:solidFill>
-                  <a:srgbClr val="FFFFFF"/>
-                </a:solidFill>
-              </a14:hiddenFill>
-            </a:ext>
-          </a:extLst>
-        </p:spPr>
-      </p:pic>
+          <p:cNvSpPr>
+            <a:spLocks noGrp="1"/>
+          </p:cNvSpPr>
+          <p:nvPr>
+            <p:ph type="title"/>
+          </p:nvPr>
+        </p:nvSpPr>
+        <p:spPr/>
+        <p:txBody>
+          <a:bodyPr/>
+          <a:lstStyle/>
+          <a:p>
+            <a:r>
+              <a:rPr lang="es-CL" dirty="0"/>
+              <a:t>Caso de uso</a:t>
+            </a:r>
+          </a:p>
+        </p:txBody>
+      </p:sp>
       <p:pic>
         <p:nvPicPr>
-          <p:cNvPr id="4" name="Imagen 3" descr="Icono&#10;&#10;El contenido generado por IA puede ser incorrecto.">
+          <p:cNvPr id="8" name="Imagen 7">
             <a:extLst>
               <a:ext uri="{FF2B5EF4-FFF2-40B4-BE49-F238E27FC236}">
-                <a16:creationId xmlns:a16="http://schemas.microsoft.com/office/drawing/2014/main" id="{0E724577-C7ED-D709-6227-5098340E9F58}"/>
+                <a16:creationId xmlns:a16="http://schemas.microsoft.com/office/drawing/2014/main" id="{34DA97F9-E0AE-4898-81E6-F3825A142225}"/>
               </a:ext>
             </a:extLst>
           </p:cNvPr>
@@ -9333,66 +8004,27 @@
           <p:nvPr/>
         </p:nvPicPr>
         <p:blipFill>
-          <a:blip r:embed="rId3"/>
+          <a:blip r:embed="rId2"/>
           <a:stretch>
             <a:fillRect/>
           </a:stretch>
         </p:blipFill>
         <p:spPr>
           <a:xfrm>
-            <a:off x="7764292" y="108352"/>
-            <a:ext cx="1137067" cy="956207"/>
+            <a:off x="1042850" y="1613647"/>
+            <a:ext cx="5481209" cy="4215966"/>
           </a:xfrm>
           <a:prstGeom prst="rect">
             <a:avLst/>
           </a:prstGeom>
         </p:spPr>
       </p:pic>
-      <p:sp>
-        <p:nvSpPr>
-          <p:cNvPr id="5" name="CuadroTexto 4">
-            <a:extLst>
-              <a:ext uri="{FF2B5EF4-FFF2-40B4-BE49-F238E27FC236}">
-                <a16:creationId xmlns:a16="http://schemas.microsoft.com/office/drawing/2014/main" id="{9133947F-F4B6-95E7-6D53-33DF76D183C0}"/>
-              </a:ext>
-            </a:extLst>
-          </p:cNvPr>
-          <p:cNvSpPr txBox="1"/>
-          <p:nvPr/>
-        </p:nvSpPr>
-        <p:spPr>
-          <a:xfrm>
-            <a:off x="7693921" y="1064559"/>
-            <a:ext cx="1360046" cy="615553"/>
-          </a:xfrm>
-          <a:prstGeom prst="rect">
-            <a:avLst/>
-          </a:prstGeom>
-          <a:noFill/>
-        </p:spPr>
-        <p:txBody>
-          <a:bodyPr wrap="square" rtlCol="0">
-            <a:spAutoFit/>
-          </a:bodyPr>
-          <a:lstStyle/>
-          <a:p>
-            <a:r>
-              <a:rPr lang="es-CL" sz="800" dirty="0"/>
-              <a:t>Facultad de ingeniería</a:t>
-            </a:r>
-          </a:p>
-          <a:p>
-            <a:r>
-              <a:rPr lang="es-CL" sz="800" dirty="0"/>
-              <a:t>Ingeniería de software I</a:t>
-            </a:r>
-          </a:p>
-          <a:p>
-            <a:endParaRPr lang="es-CL" dirty="0"/>
-          </a:p>
-        </p:txBody>
-      </p:sp>
     </p:spTree>
+    <p:extLst>
+      <p:ext uri="{BB962C8B-B14F-4D97-AF65-F5344CB8AC3E}">
+        <p14:creationId xmlns:p14="http://schemas.microsoft.com/office/powerpoint/2010/main" val="3065052590"/>
+      </p:ext>
+    </p:extLst>
   </p:cSld>
   <p:clrMapOvr>
     <a:masterClrMapping/>
@@ -9401,6 +8033,94 @@
 </file>
 
 <file path=ppt/slides/slide7.xml><?xml version="1.0" encoding="utf-8"?>
+<p:sld xmlns:a="http://schemas.openxmlformats.org/drawingml/2006/main" xmlns:r="http://schemas.openxmlformats.org/officeDocument/2006/relationships" xmlns:p="http://schemas.openxmlformats.org/presentationml/2006/main">
+  <p:cSld>
+    <p:spTree>
+      <p:nvGrpSpPr>
+        <p:cNvPr id="1" name=""/>
+        <p:cNvGrpSpPr/>
+        <p:nvPr/>
+      </p:nvGrpSpPr>
+      <p:grpSpPr>
+        <a:xfrm>
+          <a:off x="0" y="0"/>
+          <a:ext cx="0" cy="0"/>
+          <a:chOff x="0" y="0"/>
+          <a:chExt cx="0" cy="0"/>
+        </a:xfrm>
+      </p:grpSpPr>
+      <p:sp>
+        <p:nvSpPr>
+          <p:cNvPr id="2" name="Título 1">
+            <a:extLst>
+              <a:ext uri="{FF2B5EF4-FFF2-40B4-BE49-F238E27FC236}">
+                <a16:creationId xmlns:a16="http://schemas.microsoft.com/office/drawing/2014/main" id="{F1866796-51B0-45E3-AD8F-D35E7FACE5F4}"/>
+              </a:ext>
+            </a:extLst>
+          </p:cNvPr>
+          <p:cNvSpPr>
+            <a:spLocks noGrp="1"/>
+          </p:cNvSpPr>
+          <p:nvPr>
+            <p:ph type="title"/>
+          </p:nvPr>
+        </p:nvSpPr>
+        <p:spPr/>
+        <p:txBody>
+          <a:bodyPr/>
+          <a:lstStyle/>
+          <a:p>
+            <a:r>
+              <a:rPr lang="es-CL" dirty="0"/>
+              <a:t>Diagramas de secuencia</a:t>
+            </a:r>
+          </a:p>
+        </p:txBody>
+      </p:sp>
+      <p:pic>
+        <p:nvPicPr>
+          <p:cNvPr id="5" name="Imagen 4">
+            <a:extLst>
+              <a:ext uri="{FF2B5EF4-FFF2-40B4-BE49-F238E27FC236}">
+                <a16:creationId xmlns:a16="http://schemas.microsoft.com/office/drawing/2014/main" id="{AB9821BF-C17E-4414-AE0B-F95BB061E5CC}"/>
+              </a:ext>
+            </a:extLst>
+          </p:cNvPr>
+          <p:cNvPicPr>
+            <a:picLocks noChangeAspect="1"/>
+          </p:cNvPicPr>
+          <p:nvPr/>
+        </p:nvPicPr>
+        <p:blipFill>
+          <a:blip r:embed="rId2"/>
+          <a:stretch>
+            <a:fillRect/>
+          </a:stretch>
+        </p:blipFill>
+        <p:spPr>
+          <a:xfrm>
+            <a:off x="349972" y="1299881"/>
+            <a:ext cx="7028329" cy="4661647"/>
+          </a:xfrm>
+          <a:prstGeom prst="rect">
+            <a:avLst/>
+          </a:prstGeom>
+        </p:spPr>
+      </p:pic>
+    </p:spTree>
+    <p:extLst>
+      <p:ext uri="{BB962C8B-B14F-4D97-AF65-F5344CB8AC3E}">
+        <p14:creationId xmlns:p14="http://schemas.microsoft.com/office/powerpoint/2010/main" val="3355276538"/>
+      </p:ext>
+    </p:extLst>
+  </p:cSld>
+  <p:clrMapOvr>
+    <a:masterClrMapping/>
+  </p:clrMapOvr>
+</p:sld>
+</file>
+
+<file path=ppt/slides/slide8.xml><?xml version="1.0" encoding="utf-8"?>
 <p:sld xmlns:a="http://schemas.openxmlformats.org/drawingml/2006/main" xmlns:r="http://schemas.openxmlformats.org/officeDocument/2006/relationships" xmlns:p="http://schemas.openxmlformats.org/presentationml/2006/main">
   <p:cSld>
     <p:bg>
@@ -10221,114 +8941,6 @@
       </p:sp>
       <p:pic>
         <p:nvPicPr>
-          <p:cNvPr id="3" name="Picture 1133264378">
-            <a:extLst>
-              <a:ext uri="{FF2B5EF4-FFF2-40B4-BE49-F238E27FC236}">
-                <a16:creationId xmlns:a16="http://schemas.microsoft.com/office/drawing/2014/main" id="{BF25E99F-38C9-7B7B-D7D4-D9287267455D}"/>
-              </a:ext>
-            </a:extLst>
-          </p:cNvPr>
-          <p:cNvPicPr>
-            <a:picLocks noChangeAspect="1"/>
-          </p:cNvPicPr>
-          <p:nvPr/>
-        </p:nvPicPr>
-        <p:blipFill>
-          <a:blip r:embed="rId2" cstate="print">
-            <a:extLst>
-              <a:ext uri="{28A0092B-C50C-407E-A947-70E740481C1C}">
-                <a14:useLocalDpi xmlns:a14="http://schemas.microsoft.com/office/drawing/2010/main" val="0"/>
-              </a:ext>
-            </a:extLst>
-          </a:blip>
-          <a:stretch>
-            <a:fillRect/>
-          </a:stretch>
-        </p:blipFill>
-        <p:spPr>
-          <a:xfrm>
-            <a:off x="1201339" y="1605491"/>
-            <a:ext cx="5981065" cy="1819275"/>
-          </a:xfrm>
-          <a:prstGeom prst="rect">
-            <a:avLst/>
-          </a:prstGeom>
-        </p:spPr>
-      </p:pic>
-      <p:pic>
-        <p:nvPicPr>
-          <p:cNvPr id="4" name="Picture 1582867906">
-            <a:extLst>
-              <a:ext uri="{FF2B5EF4-FFF2-40B4-BE49-F238E27FC236}">
-                <a16:creationId xmlns:a16="http://schemas.microsoft.com/office/drawing/2014/main" id="{84510837-59D6-6ACA-DCBF-4699D80EAEC4}"/>
-              </a:ext>
-            </a:extLst>
-          </p:cNvPr>
-          <p:cNvPicPr>
-            <a:picLocks noChangeAspect="1"/>
-          </p:cNvPicPr>
-          <p:nvPr/>
-        </p:nvPicPr>
-        <p:blipFill>
-          <a:blip r:embed="rId3" cstate="print">
-            <a:extLst>
-              <a:ext uri="{28A0092B-C50C-407E-A947-70E740481C1C}">
-                <a14:useLocalDpi xmlns:a14="http://schemas.microsoft.com/office/drawing/2010/main" val="0"/>
-              </a:ext>
-            </a:extLst>
-          </a:blip>
-          <a:stretch>
-            <a:fillRect/>
-          </a:stretch>
-        </p:blipFill>
-        <p:spPr>
-          <a:xfrm>
-            <a:off x="1201340" y="3433233"/>
-            <a:ext cx="5981065" cy="1657350"/>
-          </a:xfrm>
-          <a:prstGeom prst="rect">
-            <a:avLst/>
-          </a:prstGeom>
-        </p:spPr>
-      </p:pic>
-      <p:pic>
-        <p:nvPicPr>
-          <p:cNvPr id="5" name="Picture 1293869529" title="Insertando imagen...">
-            <a:extLst>
-              <a:ext uri="{FF2B5EF4-FFF2-40B4-BE49-F238E27FC236}">
-                <a16:creationId xmlns:a16="http://schemas.microsoft.com/office/drawing/2014/main" id="{5F425461-4A90-FA81-59F8-A952701A0316}"/>
-              </a:ext>
-            </a:extLst>
-          </p:cNvPr>
-          <p:cNvPicPr>
-            <a:picLocks noChangeAspect="1"/>
-          </p:cNvPicPr>
-          <p:nvPr/>
-        </p:nvPicPr>
-        <p:blipFill>
-          <a:blip r:embed="rId4" cstate="print">
-            <a:extLst>
-              <a:ext uri="{28A0092B-C50C-407E-A947-70E740481C1C}">
-                <a14:useLocalDpi xmlns:a14="http://schemas.microsoft.com/office/drawing/2010/main" val="0"/>
-              </a:ext>
-            </a:extLst>
-          </a:blip>
-          <a:stretch>
-            <a:fillRect/>
-          </a:stretch>
-        </p:blipFill>
-        <p:spPr>
-          <a:xfrm>
-            <a:off x="1201340" y="5090583"/>
-            <a:ext cx="5981065" cy="1571625"/>
-          </a:xfrm>
-          <a:prstGeom prst="rect">
-            <a:avLst/>
-          </a:prstGeom>
-        </p:spPr>
-      </p:pic>
-      <p:pic>
-        <p:nvPicPr>
           <p:cNvPr id="6" name="Imagen 5" descr="Icono&#10;&#10;El contenido generado por IA puede ser incorrecto.">
             <a:extLst>
               <a:ext uri="{FF2B5EF4-FFF2-40B4-BE49-F238E27FC236}">
@@ -10342,7 +8954,7 @@
           <p:nvPr/>
         </p:nvPicPr>
         <p:blipFill>
-          <a:blip r:embed="rId5"/>
+          <a:blip r:embed="rId2"/>
           <a:stretch>
             <a:fillRect/>
           </a:stretch>
@@ -10401,142 +9013,12 @@
           </a:p>
         </p:txBody>
       </p:sp>
-    </p:spTree>
-  </p:cSld>
-  <p:clrMapOvr>
-    <a:masterClrMapping/>
-  </p:clrMapOvr>
-</p:sld>
-</file>
-
-<file path=ppt/slides/slide8.xml><?xml version="1.0" encoding="utf-8"?>
-<p:sld xmlns:a="http://schemas.openxmlformats.org/drawingml/2006/main" xmlns:r="http://schemas.openxmlformats.org/officeDocument/2006/relationships" xmlns:p="http://schemas.openxmlformats.org/presentationml/2006/main">
-  <p:cSld>
-    <p:spTree>
-      <p:nvGrpSpPr>
-        <p:cNvPr id="1" name=""/>
-        <p:cNvGrpSpPr/>
-        <p:nvPr/>
-      </p:nvGrpSpPr>
-      <p:grpSpPr>
-        <a:xfrm>
-          <a:off x="0" y="0"/>
-          <a:ext cx="0" cy="0"/>
-          <a:chOff x="0" y="0"/>
-          <a:chExt cx="0" cy="0"/>
-        </a:xfrm>
-      </p:grpSpPr>
-      <p:sp>
-        <p:nvSpPr>
-          <p:cNvPr id="2" name="Título 1">
+      <p:pic>
+        <p:nvPicPr>
+          <p:cNvPr id="11" name="Imagen 10">
             <a:extLst>
               <a:ext uri="{FF2B5EF4-FFF2-40B4-BE49-F238E27FC236}">
-                <a16:creationId xmlns:a16="http://schemas.microsoft.com/office/drawing/2014/main" id="{7EF56B3A-F8F8-2E60-35B6-CB5D0E7FBD41}"/>
-              </a:ext>
-            </a:extLst>
-          </p:cNvPr>
-          <p:cNvSpPr>
-            <a:spLocks noGrp="1"/>
-          </p:cNvSpPr>
-          <p:nvPr>
-            <p:ph type="title"/>
-          </p:nvPr>
-        </p:nvSpPr>
-        <p:spPr>
-          <a:xfrm>
-            <a:off x="70103" y="248031"/>
-            <a:ext cx="6347713" cy="567944"/>
-          </a:xfrm>
-        </p:spPr>
-        <p:txBody>
-          <a:bodyPr>
-            <a:normAutofit fontScale="90000"/>
-          </a:bodyPr>
-          <a:lstStyle/>
-          <a:p>
-            <a:r>
-              <a:rPr lang="en-US" dirty="0"/>
-              <a:t>Vista </a:t>
-            </a:r>
-            <a:r>
-              <a:rPr lang="en-US" dirty="0" err="1"/>
-              <a:t>logica</a:t>
-            </a:r>
-            <a:r>
-              <a:rPr lang="en-US" dirty="0"/>
-              <a:t>: </a:t>
-            </a:r>
-            <a:r>
-              <a:rPr lang="en-US" dirty="0" err="1"/>
-              <a:t>diagrama</a:t>
-            </a:r>
-            <a:r>
-              <a:rPr lang="en-US" dirty="0"/>
-              <a:t> de </a:t>
-            </a:r>
-            <a:r>
-              <a:rPr lang="en-US" dirty="0" err="1"/>
-              <a:t>clases</a:t>
-            </a:r>
-            <a:endParaRPr lang="es-419" dirty="0"/>
-          </a:p>
-        </p:txBody>
-      </p:sp>
-      <p:pic>
-        <p:nvPicPr>
-          <p:cNvPr id="3074" name="Picture 2" descr="Diagrama, Esquemático&#10;&#10;El contenido generado por IA puede ser incorrecto., Imagen">
-            <a:extLst>
-              <a:ext uri="{FF2B5EF4-FFF2-40B4-BE49-F238E27FC236}">
-                <a16:creationId xmlns:a16="http://schemas.microsoft.com/office/drawing/2014/main" id="{E64F9E9B-AC39-9DB7-6128-2D9E91C29885}"/>
-              </a:ext>
-            </a:extLst>
-          </p:cNvPr>
-          <p:cNvPicPr>
-            <a:picLocks noGrp="1" noChangeAspect="1" noChangeArrowheads="1"/>
-          </p:cNvPicPr>
-          <p:nvPr>
-            <p:ph idx="1"/>
-          </p:nvPr>
-        </p:nvPicPr>
-        <p:blipFill>
-          <a:blip r:embed="rId2">
-            <a:extLst>
-              <a:ext uri="{28A0092B-C50C-407E-A947-70E740481C1C}">
-                <a14:useLocalDpi xmlns:a14="http://schemas.microsoft.com/office/drawing/2010/main" val="0"/>
-              </a:ext>
-            </a:extLst>
-          </a:blip>
-          <a:srcRect/>
-          <a:stretch>
-            <a:fillRect/>
-          </a:stretch>
-        </p:blipFill>
-        <p:spPr bwMode="auto">
-          <a:xfrm>
-            <a:off x="426539" y="960120"/>
-            <a:ext cx="6714925" cy="5056632"/>
-          </a:xfrm>
-          <a:prstGeom prst="rect">
-            <a:avLst/>
-          </a:prstGeom>
-          <a:noFill/>
-          <a:extLst>
-            <a:ext uri="{909E8E84-426E-40DD-AFC4-6F175D3DCCD1}">
-              <a14:hiddenFill xmlns:a14="http://schemas.microsoft.com/office/drawing/2010/main">
-                <a:solidFill>
-                  <a:srgbClr val="FFFFFF"/>
-                </a:solidFill>
-              </a14:hiddenFill>
-            </a:ext>
-          </a:extLst>
-        </p:spPr>
-      </p:pic>
-      <p:pic>
-        <p:nvPicPr>
-          <p:cNvPr id="3" name="Imagen 2" descr="Icono&#10;&#10;El contenido generado por IA puede ser incorrecto.">
-            <a:extLst>
-              <a:ext uri="{FF2B5EF4-FFF2-40B4-BE49-F238E27FC236}">
-                <a16:creationId xmlns:a16="http://schemas.microsoft.com/office/drawing/2014/main" id="{FC80B707-FB6C-E691-571F-4F23B198A8E0}"/>
+                <a16:creationId xmlns:a16="http://schemas.microsoft.com/office/drawing/2014/main" id="{39E09C0E-AFB6-49B0-8F26-D56D1CA01BBC}"/>
               </a:ext>
             </a:extLst>
           </p:cNvPr>
@@ -10553,8 +9035,38 @@
         </p:blipFill>
         <p:spPr>
           <a:xfrm>
-            <a:off x="7764292" y="108352"/>
-            <a:ext cx="1137067" cy="956207"/>
+            <a:off x="130440" y="1409178"/>
+            <a:ext cx="7332093" cy="1796353"/>
+          </a:xfrm>
+          <a:prstGeom prst="rect">
+            <a:avLst/>
+          </a:prstGeom>
+        </p:spPr>
+      </p:pic>
+      <p:pic>
+        <p:nvPicPr>
+          <p:cNvPr id="13" name="Imagen 12">
+            <a:extLst>
+              <a:ext uri="{FF2B5EF4-FFF2-40B4-BE49-F238E27FC236}">
+                <a16:creationId xmlns:a16="http://schemas.microsoft.com/office/drawing/2014/main" id="{2F79A4E4-3370-47ED-AD18-237AB4E57F2E}"/>
+              </a:ext>
+            </a:extLst>
+          </p:cNvPr>
+          <p:cNvPicPr>
+            <a:picLocks noChangeAspect="1"/>
+          </p:cNvPicPr>
+          <p:nvPr/>
+        </p:nvPicPr>
+        <p:blipFill>
+          <a:blip r:embed="rId4"/>
+          <a:stretch>
+            <a:fillRect/>
+          </a:stretch>
+        </p:blipFill>
+        <p:spPr>
+          <a:xfrm>
+            <a:off x="130439" y="3205531"/>
+            <a:ext cx="7332093" cy="3129330"/>
           </a:xfrm>
           <a:prstGeom prst="rect">
             <a:avLst/>
@@ -10562,11 +9074,6 @@
         </p:spPr>
       </p:pic>
     </p:spTree>
-    <p:extLst>
-      <p:ext uri="{BB962C8B-B14F-4D97-AF65-F5344CB8AC3E}">
-        <p14:creationId xmlns:p14="http://schemas.microsoft.com/office/powerpoint/2010/main" val="2349242197"/>
-      </p:ext>
-    </p:extLst>
   </p:cSld>
   <p:clrMapOvr>
     <a:masterClrMapping/>
@@ -10596,7 +9103,7 @@
           <p:cNvPr id="2" name="Título 1">
             <a:extLst>
               <a:ext uri="{FF2B5EF4-FFF2-40B4-BE49-F238E27FC236}">
-                <a16:creationId xmlns:a16="http://schemas.microsoft.com/office/drawing/2014/main" id="{DE94AAA1-A393-30EC-6B2F-42207DF2A9D9}"/>
+                <a16:creationId xmlns:a16="http://schemas.microsoft.com/office/drawing/2014/main" id="{DD908331-17C3-4D0E-A3B7-4B0FCF8818DF}"/>
               </a:ext>
             </a:extLst>
           </p:cNvPr>
@@ -10614,17 +9121,46 @@
           <a:p>
             <a:r>
               <a:rPr lang="es-CL" dirty="0"/>
-              <a:t>DIAGRAMA DE COMPONENTES</a:t>
+              <a:t>Sprint Backlog y casos de uso</a:t>
             </a:r>
           </a:p>
         </p:txBody>
       </p:sp>
       <p:pic>
         <p:nvPicPr>
-          <p:cNvPr id="4" name="Imagen 3" descr="Diagrama&#10;&#10;El contenido generado por IA puede ser incorrecto.">
+          <p:cNvPr id="5" name="Marcador de contenido 4">
             <a:extLst>
               <a:ext uri="{FF2B5EF4-FFF2-40B4-BE49-F238E27FC236}">
-                <a16:creationId xmlns:a16="http://schemas.microsoft.com/office/drawing/2014/main" id="{36A702FC-2248-7780-EC8A-E88E33595EDB}"/>
+                <a16:creationId xmlns:a16="http://schemas.microsoft.com/office/drawing/2014/main" id="{98304ADB-99DD-4575-BA4D-26BD853F97E4}"/>
+              </a:ext>
+            </a:extLst>
+          </p:cNvPr>
+          <p:cNvPicPr>
+            <a:picLocks noGrp="1" noChangeAspect="1"/>
+          </p:cNvPicPr>
+          <p:nvPr>
+            <p:ph idx="1"/>
+          </p:nvPr>
+        </p:nvPicPr>
+        <p:blipFill>
+          <a:blip r:embed="rId2"/>
+          <a:stretch>
+            <a:fillRect/>
+          </a:stretch>
+        </p:blipFill>
+        <p:spPr>
+          <a:xfrm>
+            <a:off x="71718" y="1536063"/>
+            <a:ext cx="7342094" cy="2707230"/>
+          </a:xfrm>
+        </p:spPr>
+      </p:pic>
+      <p:pic>
+        <p:nvPicPr>
+          <p:cNvPr id="7" name="Imagen 6">
+            <a:extLst>
+              <a:ext uri="{FF2B5EF4-FFF2-40B4-BE49-F238E27FC236}">
+                <a16:creationId xmlns:a16="http://schemas.microsoft.com/office/drawing/2014/main" id="{C326FECB-BE6E-4807-B410-EFB562C83276}"/>
               </a:ext>
             </a:extLst>
           </p:cNvPr>
@@ -10634,21 +9170,15 @@
           <p:nvPr/>
         </p:nvPicPr>
         <p:blipFill>
-          <a:blip r:embed="rId2" cstate="print">
-            <a:extLst>
-              <a:ext uri="{28A0092B-C50C-407E-A947-70E740481C1C}">
-                <a14:useLocalDpi xmlns:a14="http://schemas.microsoft.com/office/drawing/2010/main" val="0"/>
-              </a:ext>
-            </a:extLst>
-          </a:blip>
+          <a:blip r:embed="rId3"/>
           <a:stretch>
             <a:fillRect/>
           </a:stretch>
         </p:blipFill>
         <p:spPr>
           <a:xfrm>
-            <a:off x="440087" y="2314257"/>
-            <a:ext cx="7886331" cy="3623964"/>
+            <a:off x="71718" y="4243293"/>
+            <a:ext cx="7342094" cy="1925982"/>
           </a:xfrm>
           <a:prstGeom prst="rect">
             <a:avLst/>
@@ -10658,7 +9188,7 @@
     </p:spTree>
     <p:extLst>
       <p:ext uri="{BB962C8B-B14F-4D97-AF65-F5344CB8AC3E}">
-        <p14:creationId xmlns:p14="http://schemas.microsoft.com/office/powerpoint/2010/main" val="335518239"/>
+        <p14:creationId xmlns:p14="http://schemas.microsoft.com/office/powerpoint/2010/main" val="157445369"/>
       </p:ext>
     </p:extLst>
   </p:cSld>

--- a/INCREMENTO2/PPTS/PPt Segundo incremento scrum++.pptx
+++ b/INCREMENTO2/PPTS/PPt Segundo incremento scrum++.pptx
@@ -12,11 +12,11 @@
     <p:sldId id="267" r:id="rId3"/>
     <p:sldId id="257" r:id="rId4"/>
     <p:sldId id="259" r:id="rId5"/>
-    <p:sldId id="272" r:id="rId6"/>
-    <p:sldId id="273" r:id="rId7"/>
-    <p:sldId id="274" r:id="rId8"/>
-    <p:sldId id="261" r:id="rId9"/>
-    <p:sldId id="275" r:id="rId10"/>
+    <p:sldId id="273" r:id="rId6"/>
+    <p:sldId id="274" r:id="rId7"/>
+    <p:sldId id="261" r:id="rId8"/>
+    <p:sldId id="275" r:id="rId9"/>
+    <p:sldId id="277" r:id="rId10"/>
     <p:sldId id="266" r:id="rId11"/>
     <p:sldId id="276" r:id="rId12"/>
   </p:sldIdLst>
@@ -218,7 +218,7 @@
           <a:p>
             <a:fld id="{56824AA8-F311-4ABC-8748-4A852C5A6ECD}" type="datetimeFigureOut">
               <a:rPr lang="es-419" smtClean="0"/>
-              <a:t>2/10/2025</a:t>
+              <a:t>3/10/2025</a:t>
             </a:fld>
             <a:endParaRPr lang="es-419"/>
           </a:p>
@@ -1364,7 +1364,7 @@
           <a:p>
             <a:fld id="{5BCAD085-E8A6-8845-BD4E-CB4CCA059FC4}" type="datetimeFigureOut">
               <a:rPr lang="en-US" smtClean="0"/>
-              <a:t>10/2/2025</a:t>
+              <a:t>10/3/2025</a:t>
             </a:fld>
             <a:endParaRPr lang="en-US"/>
           </a:p>
@@ -1615,7 +1615,7 @@
           <a:p>
             <a:fld id="{5BCAD085-E8A6-8845-BD4E-CB4CCA059FC4}" type="datetimeFigureOut">
               <a:rPr lang="en-US" smtClean="0"/>
-              <a:t>10/2/2025</a:t>
+              <a:t>10/3/2025</a:t>
             </a:fld>
             <a:endParaRPr lang="en-US"/>
           </a:p>
@@ -1929,7 +1929,7 @@
           <a:p>
             <a:fld id="{5BCAD085-E8A6-8845-BD4E-CB4CCA059FC4}" type="datetimeFigureOut">
               <a:rPr lang="en-US" smtClean="0"/>
-              <a:t>10/2/2025</a:t>
+              <a:t>10/3/2025</a:t>
             </a:fld>
             <a:endParaRPr lang="en-US"/>
           </a:p>
@@ -2262,7 +2262,7 @@
           <a:p>
             <a:fld id="{5BCAD085-E8A6-8845-BD4E-CB4CCA059FC4}" type="datetimeFigureOut">
               <a:rPr lang="en-US" smtClean="0"/>
-              <a:t>10/2/2025</a:t>
+              <a:t>10/3/2025</a:t>
             </a:fld>
             <a:endParaRPr lang="en-US"/>
           </a:p>
@@ -2576,7 +2576,7 @@
           <a:p>
             <a:fld id="{5BCAD085-E8A6-8845-BD4E-CB4CCA059FC4}" type="datetimeFigureOut">
               <a:rPr lang="en-US" smtClean="0"/>
-              <a:t>10/2/2025</a:t>
+              <a:t>10/3/2025</a:t>
             </a:fld>
             <a:endParaRPr lang="en-US"/>
           </a:p>
@@ -2969,7 +2969,7 @@
           <a:p>
             <a:fld id="{5BCAD085-E8A6-8845-BD4E-CB4CCA059FC4}" type="datetimeFigureOut">
               <a:rPr lang="en-US" smtClean="0"/>
-              <a:t>10/2/2025</a:t>
+              <a:t>10/3/2025</a:t>
             </a:fld>
             <a:endParaRPr lang="en-US"/>
           </a:p>
@@ -3139,7 +3139,7 @@
           <a:p>
             <a:fld id="{5BCAD085-E8A6-8845-BD4E-CB4CCA059FC4}" type="datetimeFigureOut">
               <a:rPr lang="en-US" smtClean="0"/>
-              <a:t>10/2/2025</a:t>
+              <a:t>10/3/2025</a:t>
             </a:fld>
             <a:endParaRPr lang="en-US"/>
           </a:p>
@@ -3319,7 +3319,7 @@
           <a:p>
             <a:fld id="{5BCAD085-E8A6-8845-BD4E-CB4CCA059FC4}" type="datetimeFigureOut">
               <a:rPr lang="en-US" smtClean="0"/>
-              <a:t>10/2/2025</a:t>
+              <a:t>10/3/2025</a:t>
             </a:fld>
             <a:endParaRPr lang="en-US"/>
           </a:p>
@@ -3489,7 +3489,7 @@
           <a:p>
             <a:fld id="{5BCAD085-E8A6-8845-BD4E-CB4CCA059FC4}" type="datetimeFigureOut">
               <a:rPr lang="en-US" smtClean="0"/>
-              <a:t>10/2/2025</a:t>
+              <a:t>10/3/2025</a:t>
             </a:fld>
             <a:endParaRPr lang="en-US"/>
           </a:p>
@@ -3736,7 +3736,7 @@
           <a:p>
             <a:fld id="{5BCAD085-E8A6-8845-BD4E-CB4CCA059FC4}" type="datetimeFigureOut">
               <a:rPr lang="en-US" smtClean="0"/>
-              <a:t>10/2/2025</a:t>
+              <a:t>10/3/2025</a:t>
             </a:fld>
             <a:endParaRPr lang="en-US"/>
           </a:p>
@@ -4033,7 +4033,7 @@
           <a:p>
             <a:fld id="{5BCAD085-E8A6-8845-BD4E-CB4CCA059FC4}" type="datetimeFigureOut">
               <a:rPr lang="en-US" smtClean="0"/>
-              <a:t>10/2/2025</a:t>
+              <a:t>10/3/2025</a:t>
             </a:fld>
             <a:endParaRPr lang="en-US"/>
           </a:p>
@@ -4412,7 +4412,7 @@
           <a:p>
             <a:fld id="{5BCAD085-E8A6-8845-BD4E-CB4CCA059FC4}" type="datetimeFigureOut">
               <a:rPr lang="en-US" smtClean="0"/>
-              <a:t>10/2/2025</a:t>
+              <a:t>10/3/2025</a:t>
             </a:fld>
             <a:endParaRPr lang="en-US"/>
           </a:p>
@@ -4535,7 +4535,7 @@
           <a:p>
             <a:fld id="{5BCAD085-E8A6-8845-BD4E-CB4CCA059FC4}" type="datetimeFigureOut">
               <a:rPr lang="en-US" smtClean="0"/>
-              <a:t>10/2/2025</a:t>
+              <a:t>10/3/2025</a:t>
             </a:fld>
             <a:endParaRPr lang="en-US"/>
           </a:p>
@@ -4630,7 +4630,7 @@
           <a:p>
             <a:fld id="{5BCAD085-E8A6-8845-BD4E-CB4CCA059FC4}" type="datetimeFigureOut">
               <a:rPr lang="en-US" smtClean="0"/>
-              <a:t>10/2/2025</a:t>
+              <a:t>10/3/2025</a:t>
             </a:fld>
             <a:endParaRPr lang="en-US"/>
           </a:p>
@@ -4885,7 +4885,7 @@
           <a:p>
             <a:fld id="{5BCAD085-E8A6-8845-BD4E-CB4CCA059FC4}" type="datetimeFigureOut">
               <a:rPr lang="en-US" smtClean="0"/>
-              <a:t>10/2/2025</a:t>
+              <a:t>10/3/2025</a:t>
             </a:fld>
             <a:endParaRPr lang="en-US"/>
           </a:p>
@@ -5148,7 +5148,7 @@
           <a:p>
             <a:fld id="{5BCAD085-E8A6-8845-BD4E-CB4CCA059FC4}" type="datetimeFigureOut">
               <a:rPr lang="en-US" smtClean="0"/>
-              <a:t>10/2/2025</a:t>
+              <a:t>10/3/2025</a:t>
             </a:fld>
             <a:endParaRPr lang="en-US"/>
           </a:p>
@@ -5962,7 +5962,7 @@
           <a:p>
             <a:fld id="{5BCAD085-E8A6-8845-BD4E-CB4CCA059FC4}" type="datetimeFigureOut">
               <a:rPr lang="en-US" smtClean="0"/>
-              <a:t>10/2/2025</a:t>
+              <a:t>10/3/2025</a:t>
             </a:fld>
             <a:endParaRPr lang="en-US"/>
           </a:p>
@@ -6496,7 +6496,12 @@
             <p:ph type="title"/>
           </p:nvPr>
         </p:nvSpPr>
-        <p:spPr/>
+        <p:spPr>
+          <a:xfrm>
+            <a:off x="953016" y="1833952"/>
+            <a:ext cx="6347713" cy="1320800"/>
+          </a:xfrm>
+        </p:spPr>
         <p:txBody>
           <a:bodyPr>
             <a:noAutofit/>
@@ -6505,14 +6510,14 @@
           <a:p>
             <a:pPr algn="ctr"/>
             <a:r>
-              <a:rPr lang="es-CL" sz="2000" b="1" dirty="0">
-                <a:latin typeface="Times New Roman" panose="02020603050405020304" pitchFamily="18" charset="0"/>
+              <a:rPr lang="es-CL" sz="2400" b="1" dirty="0">
+                <a:latin typeface="Trebuchet MS (Títulos)"/>
                 <a:cs typeface="Times New Roman" panose="02020603050405020304" pitchFamily="18" charset="0"/>
               </a:rPr>
               <a:t>PROYECTO INGENIERÍA DE SOFTWARE SEGUNDO INCREMENTO PARA EL SISTEMA BIOMÉTRICO WEB EUGCOM</a:t>
             </a:r>
-            <a:endParaRPr lang="es-CL" sz="2000" dirty="0">
-              <a:latin typeface="Times New Roman" panose="02020603050405020304" pitchFamily="18" charset="0"/>
+            <a:endParaRPr lang="es-CL" sz="2400" dirty="0">
+              <a:latin typeface="Trebuchet MS (Títulos)"/>
               <a:cs typeface="Times New Roman" panose="02020603050405020304" pitchFamily="18" charset="0"/>
             </a:endParaRPr>
           </a:p>
@@ -6530,17 +6535,17 @@
         </p:nvSpPr>
         <p:spPr>
           <a:xfrm>
-            <a:off x="816232" y="2905271"/>
-            <a:ext cx="6347714" cy="3880773"/>
+            <a:off x="816233" y="3225120"/>
+            <a:ext cx="6347714" cy="3448484"/>
           </a:xfrm>
         </p:spPr>
         <p:txBody>
           <a:bodyPr>
-            <a:normAutofit/>
+            <a:normAutofit fontScale="92500" lnSpcReduction="10000"/>
           </a:bodyPr>
           <a:lstStyle/>
           <a:p>
-            <a:pPr marL="0" indent="0">
+            <a:pPr marL="0" indent="0" algn="ctr">
               <a:buNone/>
             </a:pPr>
             <a:r>
@@ -6552,7 +6557,7 @@
             </a:r>
           </a:p>
           <a:p>
-            <a:pPr marL="0" indent="0">
+            <a:pPr marL="0" indent="0" algn="ctr">
               <a:buNone/>
             </a:pPr>
             <a:r>
@@ -6564,7 +6569,7 @@
             </a:r>
           </a:p>
           <a:p>
-            <a:pPr marL="0" indent="0">
+            <a:pPr marL="0" indent="0" algn="ctr">
               <a:buNone/>
             </a:pPr>
             <a:r>
@@ -6576,7 +6581,7 @@
             </a:r>
           </a:p>
           <a:p>
-            <a:pPr marL="0" indent="0">
+            <a:pPr marL="0" indent="0" algn="ctr">
               <a:buNone/>
             </a:pPr>
             <a:r>
@@ -6588,7 +6593,7 @@
             </a:r>
           </a:p>
           <a:p>
-            <a:pPr marL="0" indent="0">
+            <a:pPr marL="0" indent="0" algn="ctr">
               <a:buNone/>
             </a:pPr>
             <a:r>
@@ -6600,7 +6605,7 @@
             </a:r>
           </a:p>
           <a:p>
-            <a:pPr marL="0" indent="0">
+            <a:pPr marL="0" indent="0" algn="ctr">
               <a:buNone/>
             </a:pPr>
             <a:r>
@@ -6612,7 +6617,7 @@
             </a:r>
           </a:p>
           <a:p>
-            <a:pPr marL="0" indent="0">
+            <a:pPr marL="0" indent="0" algn="ctr">
               <a:buNone/>
             </a:pPr>
             <a:r>
@@ -6624,7 +6629,7 @@
             </a:r>
           </a:p>
           <a:p>
-            <a:pPr marL="0" indent="0">
+            <a:pPr marL="0" indent="0" algn="ctr">
               <a:buNone/>
             </a:pPr>
             <a:endParaRPr lang="es-CL" sz="1100" dirty="0">
@@ -6633,7 +6638,7 @@
             </a:endParaRPr>
           </a:p>
           <a:p>
-            <a:pPr marL="0" indent="0">
+            <a:pPr marL="0" indent="0" algn="ctr">
               <a:buNone/>
             </a:pPr>
             <a:r>
@@ -6656,7 +6661,7 @@
             </a:endParaRPr>
           </a:p>
           <a:p>
-            <a:pPr marL="0" indent="0">
+            <a:pPr marL="0" indent="0" algn="ctr">
               <a:buNone/>
             </a:pPr>
             <a:r>
@@ -6682,7 +6687,7 @@
             </a:r>
           </a:p>
           <a:p>
-            <a:pPr marL="0" indent="0">
+            <a:pPr marL="0" indent="0" algn="ctr">
               <a:buNone/>
             </a:pPr>
             <a:endParaRPr lang="es-ES" sz="1100" dirty="0">
@@ -6691,7 +6696,7 @@
             </a:endParaRPr>
           </a:p>
           <a:p>
-            <a:pPr marL="0" indent="0">
+            <a:pPr marL="0" indent="0" algn="ctr">
               <a:buNone/>
             </a:pPr>
             <a:r>
@@ -6710,7 +6715,7 @@
             </a:r>
           </a:p>
           <a:p>
-            <a:pPr marL="0" indent="0">
+            <a:pPr marL="0" indent="0" algn="ctr">
               <a:buNone/>
             </a:pPr>
             <a:r>
@@ -6752,8 +6757,8 @@
         </p:blipFill>
         <p:spPr bwMode="auto">
           <a:xfrm>
-            <a:off x="5153912" y="2109289"/>
-            <a:ext cx="1428750" cy="1428750"/>
+            <a:off x="6260740" y="2731548"/>
+            <a:ext cx="398008" cy="398008"/>
           </a:xfrm>
           <a:prstGeom prst="rect">
             <a:avLst/>
@@ -6792,7 +6797,7 @@
         </p:blipFill>
         <p:spPr>
           <a:xfrm>
-            <a:off x="7764292" y="108352"/>
+            <a:off x="3558338" y="394431"/>
             <a:ext cx="1137067" cy="956207"/>
           </a:xfrm>
           <a:prstGeom prst="rect">
@@ -6814,7 +6819,7 @@
         </p:nvSpPr>
         <p:spPr>
           <a:xfrm>
-            <a:off x="7693921" y="1064559"/>
+            <a:off x="3446848" y="1465853"/>
             <a:ext cx="1360046" cy="615553"/>
           </a:xfrm>
           <a:prstGeom prst="rect">
@@ -6836,7 +6841,7 @@
           <a:p>
             <a:r>
               <a:rPr lang="es-CL" sz="800" dirty="0"/>
-              <a:t>Ingeniería de software I</a:t>
+              <a:t>Ingeniería de software II</a:t>
             </a:r>
           </a:p>
           <a:p>
@@ -7008,7 +7013,7 @@
         </p:nvSpPr>
         <p:spPr>
           <a:xfrm>
-            <a:off x="609599" y="3297936"/>
+            <a:off x="1398143" y="2904744"/>
             <a:ext cx="6347714" cy="1320800"/>
           </a:xfrm>
         </p:spPr>
@@ -7017,18 +7022,18 @@
           <a:lstStyle/>
           <a:p>
             <a:r>
-              <a:rPr lang="en-US" dirty="0"/>
+              <a:rPr lang="en-US" b="1" dirty="0"/>
               <a:t>A Continuaci</a:t>
             </a:r>
             <a:r>
-              <a:rPr lang="es-CL" dirty="0"/>
+              <a:rPr lang="es-CL" b="1" dirty="0"/>
               <a:t>ó</a:t>
             </a:r>
             <a:r>
-              <a:rPr lang="en-US" dirty="0"/>
+              <a:rPr lang="en-US" b="1" dirty="0"/>
               <a:t>n una Demo…</a:t>
             </a:r>
-            <a:endParaRPr lang="es-419" dirty="0"/>
+            <a:endParaRPr lang="es-419" b="1" dirty="0"/>
           </a:p>
         </p:txBody>
       </p:sp>
@@ -7075,8 +7080,8 @@
         </p:nvSpPr>
         <p:spPr>
           <a:xfrm>
-            <a:off x="609599" y="2768600"/>
-            <a:ext cx="7010402" cy="1320800"/>
+            <a:off x="1066799" y="2768600"/>
+            <a:ext cx="7010402" cy="879856"/>
           </a:xfrm>
         </p:spPr>
         <p:txBody>
@@ -7084,7 +7089,7 @@
           <a:lstStyle/>
           <a:p>
             <a:r>
-              <a:rPr lang="es-CL" dirty="0"/>
+              <a:rPr lang="es-CL" b="1" dirty="0"/>
               <a:t>Muchas gracias por su atención</a:t>
             </a:r>
           </a:p>
@@ -7092,10 +7097,40 @@
       </p:sp>
       <p:pic>
         <p:nvPicPr>
-          <p:cNvPr id="3" name="Picture 2" descr="Eugcom.cl">
+          <p:cNvPr id="4" name="Imagen 3" descr="Icono&#10;&#10;El contenido generado por IA puede ser incorrecto.">
             <a:extLst>
               <a:ext uri="{FF2B5EF4-FFF2-40B4-BE49-F238E27FC236}">
-                <a16:creationId xmlns:a16="http://schemas.microsoft.com/office/drawing/2014/main" id="{CE361E6D-63F2-415F-99E0-E542F0C8BFE9}"/>
+                <a16:creationId xmlns:a16="http://schemas.microsoft.com/office/drawing/2014/main" id="{C8D6AE83-B76B-8550-E60C-FAFC2196D291}"/>
+              </a:ext>
+            </a:extLst>
+          </p:cNvPr>
+          <p:cNvPicPr>
+            <a:picLocks noChangeAspect="1"/>
+          </p:cNvPicPr>
+          <p:nvPr/>
+        </p:nvPicPr>
+        <p:blipFill>
+          <a:blip r:embed="rId2"/>
+          <a:stretch>
+            <a:fillRect/>
+          </a:stretch>
+        </p:blipFill>
+        <p:spPr>
+          <a:xfrm>
+            <a:off x="3559280" y="1061784"/>
+            <a:ext cx="1728691" cy="1453728"/>
+          </a:xfrm>
+          <a:prstGeom prst="rect">
+            <a:avLst/>
+          </a:prstGeom>
+        </p:spPr>
+      </p:pic>
+      <p:pic>
+        <p:nvPicPr>
+          <p:cNvPr id="5" name="Picture 2" descr="Eugcom.cl">
+            <a:extLst>
+              <a:ext uri="{FF2B5EF4-FFF2-40B4-BE49-F238E27FC236}">
+                <a16:creationId xmlns:a16="http://schemas.microsoft.com/office/drawing/2014/main" id="{469189A9-1DC7-EAF4-BC2E-7D4B3026796E}"/>
               </a:ext>
             </a:extLst>
           </p:cNvPr>
@@ -7105,7 +7140,7 @@
           <p:nvPr/>
         </p:nvPicPr>
         <p:blipFill>
-          <a:blip r:embed="rId2">
+          <a:blip r:embed="rId3">
             <a:extLst>
               <a:ext uri="{28A0092B-C50C-407E-A947-70E740481C1C}">
                 <a14:useLocalDpi xmlns:a14="http://schemas.microsoft.com/office/drawing/2010/main" val="0"/>
@@ -7119,8 +7154,8 @@
         </p:blipFill>
         <p:spPr bwMode="auto">
           <a:xfrm>
-            <a:off x="609599" y="496025"/>
-            <a:ext cx="1137067" cy="1137067"/>
+            <a:off x="3684093" y="3648456"/>
+            <a:ext cx="1479063" cy="1479063"/>
           </a:xfrm>
           <a:prstGeom prst="rect">
             <a:avLst/>
@@ -7190,10 +7225,10 @@
           <a:p>
             <a:pPr algn="ctr"/>
             <a:r>
-              <a:rPr lang="es-CL" dirty="0"/>
+              <a:rPr lang="es-CL" b="1" dirty="0"/>
               <a:t>Contenido</a:t>
             </a:r>
-            <a:endParaRPr lang="es-419" dirty="0"/>
+            <a:endParaRPr lang="es-419" b="1" dirty="0"/>
           </a:p>
         </p:txBody>
       </p:sp>
@@ -7218,6 +7253,7 @@
           <a:bodyPr/>
           <a:lstStyle/>
           <a:p>
+            <a:pPr algn="just"/>
             <a:r>
               <a:rPr lang="es-CL" dirty="0"/>
               <a:t>Incremento 2 </a:t>
@@ -7232,18 +7268,21 @@
             </a:r>
           </a:p>
           <a:p>
+            <a:pPr algn="just"/>
             <a:r>
               <a:rPr lang="es-CL" dirty="0"/>
               <a:t>Casos de uso </a:t>
             </a:r>
           </a:p>
           <a:p>
+            <a:pPr algn="just"/>
             <a:r>
               <a:rPr lang="es-CL" dirty="0"/>
               <a:t>Diagramas Secuencia</a:t>
             </a:r>
           </a:p>
           <a:p>
+            <a:pPr algn="just"/>
             <a:r>
               <a:rPr lang="es-CL" dirty="0"/>
               <a:t>Sprint backlog y casos de uso </a:t>
@@ -7258,6 +7297,7 @@
             </a:r>
           </a:p>
           <a:p>
+            <a:pPr algn="just"/>
             <a:r>
               <a:rPr lang="es-CL" dirty="0"/>
               <a:t>Tabla de esfuerzo </a:t>
@@ -7272,12 +7312,22 @@
             </a:r>
           </a:p>
           <a:p>
+            <a:pPr algn="just"/>
             <a:r>
               <a:rPr lang="es-CL" dirty="0"/>
-              <a:t>Pruebas Unitarias cap5</a:t>
-            </a:r>
-          </a:p>
-          <a:p>
+              <a:t>Pruebas Unitarias </a:t>
+            </a:r>
+            <a:r>
+              <a:rPr lang="es-CL" dirty="0" err="1"/>
+              <a:t>cap</a:t>
+            </a:r>
+            <a:r>
+              <a:rPr lang="es-CL" dirty="0"/>
+              <a:t> 5</a:t>
+            </a:r>
+          </a:p>
+          <a:p>
+            <a:pPr algn="just"/>
             <a:r>
               <a:rPr lang="es-CL" dirty="0"/>
               <a:t>Pruebas de sistema </a:t>
@@ -7475,7 +7525,7 @@
           <a:lstStyle/>
           <a:p>
             <a:r>
-              <a:rPr lang="es-419" sz="3100"/>
+              <a:rPr lang="es-419" sz="3100" b="1" dirty="0"/>
               <a:t>Introducción</a:t>
             </a:r>
           </a:p>
@@ -7602,6 +7652,53 @@
           </a:p>
         </p:txBody>
       </p:sp>
+      <p:pic>
+        <p:nvPicPr>
+          <p:cNvPr id="5" name="Picture 2" descr="Eugcom.cl">
+            <a:extLst>
+              <a:ext uri="{FF2B5EF4-FFF2-40B4-BE49-F238E27FC236}">
+                <a16:creationId xmlns:a16="http://schemas.microsoft.com/office/drawing/2014/main" id="{9DE2593D-C8E3-D325-8501-95C378098BB3}"/>
+              </a:ext>
+            </a:extLst>
+          </p:cNvPr>
+          <p:cNvPicPr>
+            <a:picLocks noChangeAspect="1" noChangeArrowheads="1"/>
+          </p:cNvPicPr>
+          <p:nvPr/>
+        </p:nvPicPr>
+        <p:blipFill>
+          <a:blip r:embed="rId2">
+            <a:extLst>
+              <a:ext uri="{28A0092B-C50C-407E-A947-70E740481C1C}">
+                <a14:useLocalDpi xmlns:a14="http://schemas.microsoft.com/office/drawing/2010/main" val="0"/>
+              </a:ext>
+            </a:extLst>
+          </a:blip>
+          <a:srcRect/>
+          <a:stretch>
+            <a:fillRect/>
+          </a:stretch>
+        </p:blipFill>
+        <p:spPr bwMode="auto">
+          <a:xfrm>
+            <a:off x="102849" y="108353"/>
+            <a:ext cx="577448" cy="577448"/>
+          </a:xfrm>
+          <a:prstGeom prst="rect">
+            <a:avLst/>
+          </a:prstGeom>
+          <a:noFill/>
+          <a:extLst>
+            <a:ext uri="{909E8E84-426E-40DD-AFC4-6F175D3DCCD1}">
+              <a14:hiddenFill xmlns:a14="http://schemas.microsoft.com/office/drawing/2010/main">
+                <a:solidFill>
+                  <a:srgbClr val="FFFFFF"/>
+                </a:solidFill>
+              </a14:hiddenFill>
+            </a:ext>
+          </a:extLst>
+        </p:spPr>
+      </p:pic>
     </p:spTree>
   </p:cSld>
   <p:clrMapOvr>
@@ -7637,24 +7734,29 @@
             <p:ph type="title"/>
           </p:nvPr>
         </p:nvSpPr>
-        <p:spPr/>
+        <p:spPr>
+          <a:xfrm>
+            <a:off x="2851403" y="448893"/>
+            <a:ext cx="3441193" cy="807720"/>
+          </a:xfrm>
+        </p:spPr>
         <p:txBody>
           <a:bodyPr/>
           <a:lstStyle/>
           <a:p>
             <a:r>
-              <a:rPr dirty="0" err="1"/>
+              <a:rPr b="1" dirty="0" err="1"/>
               <a:t>Incremento</a:t>
             </a:r>
             <a:r>
-              <a:rPr dirty="0"/>
+              <a:rPr b="1" dirty="0"/>
               <a:t> </a:t>
             </a:r>
             <a:r>
-              <a:rPr lang="es-CL" dirty="0"/>
+              <a:rPr lang="es-CL" b="1" dirty="0"/>
               <a:t>2</a:t>
             </a:r>
-            <a:endParaRPr dirty="0"/>
+            <a:endParaRPr b="1" dirty="0"/>
           </a:p>
         </p:txBody>
       </p:sp>
@@ -7718,7 +7820,7 @@
             </a:r>
             <a:r>
               <a:rPr lang="es-CL" dirty="0"/>
-              <a:t>93</a:t>
+              <a:t>91</a:t>
             </a:r>
             <a:r>
               <a:rPr dirty="0"/>
@@ -7756,8 +7858,8 @@
         </p:blipFill>
         <p:spPr bwMode="auto">
           <a:xfrm>
-            <a:off x="5896737" y="2000250"/>
-            <a:ext cx="1428750" cy="1428750"/>
+            <a:off x="102849" y="108353"/>
+            <a:ext cx="577448" cy="577448"/>
           </a:xfrm>
           <a:prstGeom prst="rect">
             <a:avLst/>
@@ -7848,6 +7950,94 @@
           </a:p>
         </p:txBody>
       </p:sp>
+      <p:pic>
+        <p:nvPicPr>
+          <p:cNvPr id="6" name="Imagen 5" descr="Gráfico, Gráfico de barras, Histograma&#10;&#10;El contenido generado por IA puede ser incorrecto.">
+            <a:extLst>
+              <a:ext uri="{FF2B5EF4-FFF2-40B4-BE49-F238E27FC236}">
+                <a16:creationId xmlns:a16="http://schemas.microsoft.com/office/drawing/2014/main" id="{1A250E69-2420-A118-6C38-59F8EC6B6975}"/>
+              </a:ext>
+            </a:extLst>
+          </p:cNvPr>
+          <p:cNvPicPr>
+            <a:picLocks noChangeAspect="1"/>
+          </p:cNvPicPr>
+          <p:nvPr/>
+        </p:nvPicPr>
+        <p:blipFill>
+          <a:blip r:embed="rId4"/>
+          <a:stretch>
+            <a:fillRect/>
+          </a:stretch>
+        </p:blipFill>
+        <p:spPr>
+          <a:xfrm>
+            <a:off x="509650" y="3654900"/>
+            <a:ext cx="3217417" cy="2845253"/>
+          </a:xfrm>
+          <a:prstGeom prst="rect">
+            <a:avLst/>
+          </a:prstGeom>
+        </p:spPr>
+        <p:style>
+          <a:lnRef idx="2">
+            <a:schemeClr val="dk1"/>
+          </a:lnRef>
+          <a:fillRef idx="1">
+            <a:schemeClr val="lt1"/>
+          </a:fillRef>
+          <a:effectRef idx="0">
+            <a:schemeClr val="dk1"/>
+          </a:effectRef>
+          <a:fontRef idx="minor">
+            <a:schemeClr val="dk1"/>
+          </a:fontRef>
+        </p:style>
+      </p:pic>
+      <p:pic>
+        <p:nvPicPr>
+          <p:cNvPr id="7" name="Imagen 6" descr="Gráfico, Gráfico circular&#10;&#10;El contenido generado por IA puede ser incorrecto.">
+            <a:extLst>
+              <a:ext uri="{FF2B5EF4-FFF2-40B4-BE49-F238E27FC236}">
+                <a16:creationId xmlns:a16="http://schemas.microsoft.com/office/drawing/2014/main" id="{79BE7D5A-2AB0-69F1-0152-E687AB796A25}"/>
+              </a:ext>
+            </a:extLst>
+          </p:cNvPr>
+          <p:cNvPicPr>
+            <a:picLocks noChangeAspect="1"/>
+          </p:cNvPicPr>
+          <p:nvPr/>
+        </p:nvPicPr>
+        <p:blipFill>
+          <a:blip r:embed="rId5"/>
+          <a:stretch>
+            <a:fillRect/>
+          </a:stretch>
+        </p:blipFill>
+        <p:spPr>
+          <a:xfrm>
+            <a:off x="4400933" y="3654901"/>
+            <a:ext cx="2656329" cy="2845252"/>
+          </a:xfrm>
+          <a:prstGeom prst="rect">
+            <a:avLst/>
+          </a:prstGeom>
+        </p:spPr>
+        <p:style>
+          <a:lnRef idx="2">
+            <a:schemeClr val="dk1"/>
+          </a:lnRef>
+          <a:fillRef idx="1">
+            <a:schemeClr val="lt1"/>
+          </a:fillRef>
+          <a:effectRef idx="0">
+            <a:schemeClr val="dk1"/>
+          </a:effectRef>
+          <a:fontRef idx="minor">
+            <a:schemeClr val="dk1"/>
+          </a:fontRef>
+        </p:style>
+      </p:pic>
     </p:spTree>
   </p:cSld>
   <p:clrMapOvr>
@@ -7878,7 +8068,7 @@
           <p:cNvPr id="2" name="Título 1">
             <a:extLst>
               <a:ext uri="{FF2B5EF4-FFF2-40B4-BE49-F238E27FC236}">
-                <a16:creationId xmlns:a16="http://schemas.microsoft.com/office/drawing/2014/main" id="{42D6B30E-CF24-4AD5-8A2B-CF35257C303D}"/>
+                <a16:creationId xmlns:a16="http://schemas.microsoft.com/office/drawing/2014/main" id="{8F45BA60-3D89-444B-B3F1-D90FC5798A47}"/>
               </a:ext>
             </a:extLst>
           </p:cNvPr>
@@ -7889,24 +8079,29 @@
             <p:ph type="title"/>
           </p:nvPr>
         </p:nvSpPr>
-        <p:spPr/>
+        <p:spPr>
+          <a:xfrm>
+            <a:off x="2378325" y="336087"/>
+            <a:ext cx="2810257" cy="771144"/>
+          </a:xfrm>
+        </p:spPr>
         <p:txBody>
           <a:bodyPr/>
           <a:lstStyle/>
           <a:p>
             <a:r>
-              <a:rPr lang="es-CL" dirty="0"/>
-              <a:t>Casos de uso </a:t>
+              <a:rPr lang="es-CL" b="1" dirty="0"/>
+              <a:t>Caso de uso</a:t>
             </a:r>
           </a:p>
         </p:txBody>
       </p:sp>
       <p:pic>
         <p:nvPicPr>
-          <p:cNvPr id="14" name="Imagen 13">
+          <p:cNvPr id="8" name="Imagen 7">
             <a:extLst>
               <a:ext uri="{FF2B5EF4-FFF2-40B4-BE49-F238E27FC236}">
-                <a16:creationId xmlns:a16="http://schemas.microsoft.com/office/drawing/2014/main" id="{48DB30DB-ADED-4494-AF48-F3443045BC86}"/>
+                <a16:creationId xmlns:a16="http://schemas.microsoft.com/office/drawing/2014/main" id="{34DA97F9-E0AE-4898-81E6-F3825A142225}"/>
               </a:ext>
             </a:extLst>
           </p:cNvPr>
@@ -7923,18 +8118,109 @@
         </p:blipFill>
         <p:spPr>
           <a:xfrm>
-            <a:off x="1249898" y="1685365"/>
-            <a:ext cx="5437774" cy="4078941"/>
+            <a:off x="1831395" y="1617950"/>
+            <a:ext cx="5481209" cy="4215966"/>
+          </a:xfrm>
+          <a:prstGeom prst="rect">
+            <a:avLst/>
+          </a:prstGeom>
+          <a:ln w="38100" cap="sq">
+            <a:solidFill>
+              <a:srgbClr val="000000"/>
+            </a:solidFill>
+            <a:prstDash val="solid"/>
+            <a:miter lim="800000"/>
+          </a:ln>
+          <a:effectLst>
+            <a:outerShdw blurRad="50800" dist="38100" dir="2700000" algn="tl" rotWithShape="0">
+              <a:srgbClr val="000000">
+                <a:alpha val="43000"/>
+              </a:srgbClr>
+            </a:outerShdw>
+          </a:effectLst>
+        </p:spPr>
+      </p:pic>
+      <p:pic>
+        <p:nvPicPr>
+          <p:cNvPr id="3" name="Imagen 2" descr="Icono&#10;&#10;El contenido generado por IA puede ser incorrecto.">
+            <a:extLst>
+              <a:ext uri="{FF2B5EF4-FFF2-40B4-BE49-F238E27FC236}">
+                <a16:creationId xmlns:a16="http://schemas.microsoft.com/office/drawing/2014/main" id="{A0DDD05E-97D6-B8E4-F170-B3372DA001E5}"/>
+              </a:ext>
+            </a:extLst>
+          </p:cNvPr>
+          <p:cNvPicPr>
+            <a:picLocks noChangeAspect="1"/>
+          </p:cNvPicPr>
+          <p:nvPr/>
+        </p:nvPicPr>
+        <p:blipFill>
+          <a:blip r:embed="rId3"/>
+          <a:stretch>
+            <a:fillRect/>
+          </a:stretch>
+        </p:blipFill>
+        <p:spPr>
+          <a:xfrm>
+            <a:off x="7764292" y="108352"/>
+            <a:ext cx="1137067" cy="956207"/>
           </a:xfrm>
           <a:prstGeom prst="rect">
             <a:avLst/>
           </a:prstGeom>
         </p:spPr>
       </p:pic>
+      <p:pic>
+        <p:nvPicPr>
+          <p:cNvPr id="4" name="Picture 2" descr="Eugcom.cl">
+            <a:extLst>
+              <a:ext uri="{FF2B5EF4-FFF2-40B4-BE49-F238E27FC236}">
+                <a16:creationId xmlns:a16="http://schemas.microsoft.com/office/drawing/2014/main" id="{3375520D-3975-2513-BC47-AF83AB4BA93B}"/>
+              </a:ext>
+            </a:extLst>
+          </p:cNvPr>
+          <p:cNvPicPr>
+            <a:picLocks noChangeAspect="1" noChangeArrowheads="1"/>
+          </p:cNvPicPr>
+          <p:nvPr/>
+        </p:nvPicPr>
+        <p:blipFill>
+          <a:blip r:embed="rId4">
+            <a:extLst>
+              <a:ext uri="{28A0092B-C50C-407E-A947-70E740481C1C}">
+                <a14:useLocalDpi xmlns:a14="http://schemas.microsoft.com/office/drawing/2010/main" val="0"/>
+              </a:ext>
+            </a:extLst>
+          </a:blip>
+          <a:srcRect/>
+          <a:stretch>
+            <a:fillRect/>
+          </a:stretch>
+        </p:blipFill>
+        <p:spPr bwMode="auto">
+          <a:xfrm>
+            <a:off x="102849" y="108353"/>
+            <a:ext cx="577448" cy="577448"/>
+          </a:xfrm>
+          <a:prstGeom prst="rect">
+            <a:avLst/>
+          </a:prstGeom>
+          <a:noFill/>
+          <a:extLst>
+            <a:ext uri="{909E8E84-426E-40DD-AFC4-6F175D3DCCD1}">
+              <a14:hiddenFill xmlns:a14="http://schemas.microsoft.com/office/drawing/2010/main">
+                <a:solidFill>
+                  <a:srgbClr val="FFFFFF"/>
+                </a:solidFill>
+              </a14:hiddenFill>
+            </a:ext>
+          </a:extLst>
+        </p:spPr>
+      </p:pic>
     </p:spTree>
     <p:extLst>
       <p:ext uri="{BB962C8B-B14F-4D97-AF65-F5344CB8AC3E}">
-        <p14:creationId xmlns:p14="http://schemas.microsoft.com/office/powerpoint/2010/main" val="3175595360"/>
+        <p14:creationId xmlns:p14="http://schemas.microsoft.com/office/powerpoint/2010/main" val="3065052590"/>
       </p:ext>
     </p:extLst>
   </p:cSld>
@@ -7966,94 +8252,6 @@
           <p:cNvPr id="2" name="Título 1">
             <a:extLst>
               <a:ext uri="{FF2B5EF4-FFF2-40B4-BE49-F238E27FC236}">
-                <a16:creationId xmlns:a16="http://schemas.microsoft.com/office/drawing/2014/main" id="{8F45BA60-3D89-444B-B3F1-D90FC5798A47}"/>
-              </a:ext>
-            </a:extLst>
-          </p:cNvPr>
-          <p:cNvSpPr>
-            <a:spLocks noGrp="1"/>
-          </p:cNvSpPr>
-          <p:nvPr>
-            <p:ph type="title"/>
-          </p:nvPr>
-        </p:nvSpPr>
-        <p:spPr/>
-        <p:txBody>
-          <a:bodyPr/>
-          <a:lstStyle/>
-          <a:p>
-            <a:r>
-              <a:rPr lang="es-CL" dirty="0"/>
-              <a:t>Caso de uso</a:t>
-            </a:r>
-          </a:p>
-        </p:txBody>
-      </p:sp>
-      <p:pic>
-        <p:nvPicPr>
-          <p:cNvPr id="8" name="Imagen 7">
-            <a:extLst>
-              <a:ext uri="{FF2B5EF4-FFF2-40B4-BE49-F238E27FC236}">
-                <a16:creationId xmlns:a16="http://schemas.microsoft.com/office/drawing/2014/main" id="{34DA97F9-E0AE-4898-81E6-F3825A142225}"/>
-              </a:ext>
-            </a:extLst>
-          </p:cNvPr>
-          <p:cNvPicPr>
-            <a:picLocks noChangeAspect="1"/>
-          </p:cNvPicPr>
-          <p:nvPr/>
-        </p:nvPicPr>
-        <p:blipFill>
-          <a:blip r:embed="rId2"/>
-          <a:stretch>
-            <a:fillRect/>
-          </a:stretch>
-        </p:blipFill>
-        <p:spPr>
-          <a:xfrm>
-            <a:off x="1042850" y="1613647"/>
-            <a:ext cx="5481209" cy="4215966"/>
-          </a:xfrm>
-          <a:prstGeom prst="rect">
-            <a:avLst/>
-          </a:prstGeom>
-        </p:spPr>
-      </p:pic>
-    </p:spTree>
-    <p:extLst>
-      <p:ext uri="{BB962C8B-B14F-4D97-AF65-F5344CB8AC3E}">
-        <p14:creationId xmlns:p14="http://schemas.microsoft.com/office/powerpoint/2010/main" val="3065052590"/>
-      </p:ext>
-    </p:extLst>
-  </p:cSld>
-  <p:clrMapOvr>
-    <a:masterClrMapping/>
-  </p:clrMapOvr>
-</p:sld>
-</file>
-
-<file path=ppt/slides/slide7.xml><?xml version="1.0" encoding="utf-8"?>
-<p:sld xmlns:a="http://schemas.openxmlformats.org/drawingml/2006/main" xmlns:r="http://schemas.openxmlformats.org/officeDocument/2006/relationships" xmlns:p="http://schemas.openxmlformats.org/presentationml/2006/main">
-  <p:cSld>
-    <p:spTree>
-      <p:nvGrpSpPr>
-        <p:cNvPr id="1" name=""/>
-        <p:cNvGrpSpPr/>
-        <p:nvPr/>
-      </p:nvGrpSpPr>
-      <p:grpSpPr>
-        <a:xfrm>
-          <a:off x="0" y="0"/>
-          <a:ext cx="0" cy="0"/>
-          <a:chOff x="0" y="0"/>
-          <a:chExt cx="0" cy="0"/>
-        </a:xfrm>
-      </p:grpSpPr>
-      <p:sp>
-        <p:nvSpPr>
-          <p:cNvPr id="2" name="Título 1">
-            <a:extLst>
-              <a:ext uri="{FF2B5EF4-FFF2-40B4-BE49-F238E27FC236}">
                 <a16:creationId xmlns:a16="http://schemas.microsoft.com/office/drawing/2014/main" id="{F1866796-51B0-45E3-AD8F-D35E7FACE5F4}"/>
               </a:ext>
             </a:extLst>
@@ -8065,13 +8263,20 @@
             <p:ph type="title"/>
           </p:nvPr>
         </p:nvSpPr>
-        <p:spPr/>
-        <p:txBody>
-          <a:bodyPr/>
+        <p:spPr>
+          <a:xfrm>
+            <a:off x="1548464" y="226359"/>
+            <a:ext cx="5421323" cy="844296"/>
+          </a:xfrm>
+        </p:spPr>
+        <p:txBody>
+          <a:bodyPr>
+            <a:noAutofit/>
+          </a:bodyPr>
           <a:lstStyle/>
           <a:p>
             <a:r>
-              <a:rPr lang="es-CL" dirty="0"/>
+              <a:rPr lang="es-CL" b="1" dirty="0"/>
               <a:t>Diagramas de secuencia</a:t>
             </a:r>
           </a:p>
@@ -8099,12 +8304,99 @@
         </p:blipFill>
         <p:spPr>
           <a:xfrm>
-            <a:off x="349972" y="1299881"/>
-            <a:ext cx="7028329" cy="4661647"/>
+            <a:off x="680297" y="1627531"/>
+            <a:ext cx="6768702" cy="4489445"/>
           </a:xfrm>
           <a:prstGeom prst="rect">
             <a:avLst/>
           </a:prstGeom>
+          <a:ln>
+            <a:noFill/>
+          </a:ln>
+          <a:effectLst>
+            <a:outerShdw blurRad="190500" algn="tl" rotWithShape="0">
+              <a:srgbClr val="000000">
+                <a:alpha val="70000"/>
+              </a:srgbClr>
+            </a:outerShdw>
+          </a:effectLst>
+        </p:spPr>
+      </p:pic>
+      <p:pic>
+        <p:nvPicPr>
+          <p:cNvPr id="3" name="Imagen 2" descr="Icono&#10;&#10;El contenido generado por IA puede ser incorrecto.">
+            <a:extLst>
+              <a:ext uri="{FF2B5EF4-FFF2-40B4-BE49-F238E27FC236}">
+                <a16:creationId xmlns:a16="http://schemas.microsoft.com/office/drawing/2014/main" id="{C8E875FD-C279-295C-FA69-BCCC21A2B631}"/>
+              </a:ext>
+            </a:extLst>
+          </p:cNvPr>
+          <p:cNvPicPr>
+            <a:picLocks noChangeAspect="1"/>
+          </p:cNvPicPr>
+          <p:nvPr/>
+        </p:nvPicPr>
+        <p:blipFill>
+          <a:blip r:embed="rId3"/>
+          <a:stretch>
+            <a:fillRect/>
+          </a:stretch>
+        </p:blipFill>
+        <p:spPr>
+          <a:xfrm>
+            <a:off x="7764292" y="108352"/>
+            <a:ext cx="1137067" cy="956207"/>
+          </a:xfrm>
+          <a:prstGeom prst="rect">
+            <a:avLst/>
+          </a:prstGeom>
+        </p:spPr>
+      </p:pic>
+      <p:pic>
+        <p:nvPicPr>
+          <p:cNvPr id="4" name="Picture 2" descr="Eugcom.cl">
+            <a:extLst>
+              <a:ext uri="{FF2B5EF4-FFF2-40B4-BE49-F238E27FC236}">
+                <a16:creationId xmlns:a16="http://schemas.microsoft.com/office/drawing/2014/main" id="{25E4DD3E-7B80-340E-04C8-89F9A65C05BC}"/>
+              </a:ext>
+            </a:extLst>
+          </p:cNvPr>
+          <p:cNvPicPr>
+            <a:picLocks noChangeAspect="1" noChangeArrowheads="1"/>
+          </p:cNvPicPr>
+          <p:nvPr/>
+        </p:nvPicPr>
+        <p:blipFill>
+          <a:blip r:embed="rId4">
+            <a:extLst>
+              <a:ext uri="{28A0092B-C50C-407E-A947-70E740481C1C}">
+                <a14:useLocalDpi xmlns:a14="http://schemas.microsoft.com/office/drawing/2010/main" val="0"/>
+              </a:ext>
+            </a:extLst>
+          </a:blip>
+          <a:srcRect/>
+          <a:stretch>
+            <a:fillRect/>
+          </a:stretch>
+        </p:blipFill>
+        <p:spPr bwMode="auto">
+          <a:xfrm>
+            <a:off x="102849" y="108353"/>
+            <a:ext cx="577448" cy="577448"/>
+          </a:xfrm>
+          <a:prstGeom prst="rect">
+            <a:avLst/>
+          </a:prstGeom>
+          <a:noFill/>
+          <a:extLst>
+            <a:ext uri="{909E8E84-426E-40DD-AFC4-6F175D3DCCD1}">
+              <a14:hiddenFill xmlns:a14="http://schemas.microsoft.com/office/drawing/2010/main">
+                <a:solidFill>
+                  <a:srgbClr val="FFFFFF"/>
+                </a:solidFill>
+              </a14:hiddenFill>
+            </a:ext>
+          </a:extLst>
         </p:spPr>
       </p:pic>
     </p:spTree>
@@ -8120,7 +8412,7 @@
 </p:sld>
 </file>
 
-<file path=ppt/slides/slide8.xml><?xml version="1.0" encoding="utf-8"?>
+<file path=ppt/slides/slide7.xml><?xml version="1.0" encoding="utf-8"?>
 <p:sld xmlns:a="http://schemas.openxmlformats.org/drawingml/2006/main" xmlns:r="http://schemas.openxmlformats.org/officeDocument/2006/relationships" xmlns:p="http://schemas.openxmlformats.org/presentationml/2006/main">
   <p:cSld>
     <p:bg>
@@ -8910,13 +9202,13 @@
         </p:nvSpPr>
         <p:spPr>
           <a:xfrm>
-            <a:off x="1129831" y="404865"/>
-            <a:ext cx="5755351" cy="1087656"/>
+            <a:off x="666484" y="263050"/>
+            <a:ext cx="6612075" cy="733570"/>
           </a:xfrm>
         </p:spPr>
         <p:txBody>
           <a:bodyPr vert="horz" lIns="91440" tIns="45720" rIns="91440" bIns="45720" rtlCol="0" anchor="b">
-            <a:normAutofit/>
+            <a:noAutofit/>
           </a:bodyPr>
           <a:lstStyle/>
           <a:p>
@@ -8926,7 +9218,7 @@
               </a:lnSpc>
             </a:pPr>
             <a:r>
-              <a:rPr lang="en-US" kern="1200" dirty="0">
+              <a:rPr lang="en-US" b="1" kern="1200" dirty="0">
                 <a:solidFill>
                   <a:schemeClr val="accent1"/>
                 </a:solidFill>
@@ -9041,6 +9333,16 @@
           <a:prstGeom prst="rect">
             <a:avLst/>
           </a:prstGeom>
+          <a:ln>
+            <a:noFill/>
+          </a:ln>
+          <a:effectLst>
+            <a:outerShdw blurRad="292100" dist="139700" dir="2700000" algn="tl" rotWithShape="0">
+              <a:srgbClr val="333333">
+                <a:alpha val="65000"/>
+              </a:srgbClr>
+            </a:outerShdw>
+          </a:effectLst>
         </p:spPr>
       </p:pic>
       <p:pic>
@@ -9071,9 +9373,288 @@
           <a:prstGeom prst="rect">
             <a:avLst/>
           </a:prstGeom>
+          <a:ln>
+            <a:noFill/>
+          </a:ln>
+          <a:effectLst>
+            <a:outerShdw blurRad="292100" dist="139700" dir="2700000" algn="tl" rotWithShape="0">
+              <a:srgbClr val="333333">
+                <a:alpha val="65000"/>
+              </a:srgbClr>
+            </a:outerShdw>
+          </a:effectLst>
+        </p:spPr>
+      </p:pic>
+      <p:pic>
+        <p:nvPicPr>
+          <p:cNvPr id="3" name="Picture 2" descr="Eugcom.cl">
+            <a:extLst>
+              <a:ext uri="{FF2B5EF4-FFF2-40B4-BE49-F238E27FC236}">
+                <a16:creationId xmlns:a16="http://schemas.microsoft.com/office/drawing/2014/main" id="{0D42CBF2-3925-4B85-D564-4F24C29F3511}"/>
+              </a:ext>
+            </a:extLst>
+          </p:cNvPr>
+          <p:cNvPicPr>
+            <a:picLocks noChangeAspect="1" noChangeArrowheads="1"/>
+          </p:cNvPicPr>
+          <p:nvPr/>
+        </p:nvPicPr>
+        <p:blipFill>
+          <a:blip r:embed="rId5">
+            <a:extLst>
+              <a:ext uri="{28A0092B-C50C-407E-A947-70E740481C1C}">
+                <a14:useLocalDpi xmlns:a14="http://schemas.microsoft.com/office/drawing/2010/main" val="0"/>
+              </a:ext>
+            </a:extLst>
+          </a:blip>
+          <a:srcRect/>
+          <a:stretch>
+            <a:fillRect/>
+          </a:stretch>
+        </p:blipFill>
+        <p:spPr bwMode="auto">
+          <a:xfrm>
+            <a:off x="102849" y="108353"/>
+            <a:ext cx="577448" cy="577448"/>
+          </a:xfrm>
+          <a:prstGeom prst="rect">
+            <a:avLst/>
+          </a:prstGeom>
+          <a:noFill/>
+          <a:extLst>
+            <a:ext uri="{909E8E84-426E-40DD-AFC4-6F175D3DCCD1}">
+              <a14:hiddenFill xmlns:a14="http://schemas.microsoft.com/office/drawing/2010/main">
+                <a:solidFill>
+                  <a:srgbClr val="FFFFFF"/>
+                </a:solidFill>
+              </a14:hiddenFill>
+            </a:ext>
+          </a:extLst>
         </p:spPr>
       </p:pic>
     </p:spTree>
+  </p:cSld>
+  <p:clrMapOvr>
+    <a:masterClrMapping/>
+  </p:clrMapOvr>
+</p:sld>
+</file>
+
+<file path=ppt/slides/slide8.xml><?xml version="1.0" encoding="utf-8"?>
+<p:sld xmlns:a="http://schemas.openxmlformats.org/drawingml/2006/main" xmlns:r="http://schemas.openxmlformats.org/officeDocument/2006/relationships" xmlns:p="http://schemas.openxmlformats.org/presentationml/2006/main">
+  <p:cSld>
+    <p:spTree>
+      <p:nvGrpSpPr>
+        <p:cNvPr id="1" name=""/>
+        <p:cNvGrpSpPr/>
+        <p:nvPr/>
+      </p:nvGrpSpPr>
+      <p:grpSpPr>
+        <a:xfrm>
+          <a:off x="0" y="0"/>
+          <a:ext cx="0" cy="0"/>
+          <a:chOff x="0" y="0"/>
+          <a:chExt cx="0" cy="0"/>
+        </a:xfrm>
+      </p:grpSpPr>
+      <p:sp>
+        <p:nvSpPr>
+          <p:cNvPr id="2" name="Título 1">
+            <a:extLst>
+              <a:ext uri="{FF2B5EF4-FFF2-40B4-BE49-F238E27FC236}">
+                <a16:creationId xmlns:a16="http://schemas.microsoft.com/office/drawing/2014/main" id="{DD908331-17C3-4D0E-A3B7-4B0FCF8818DF}"/>
+              </a:ext>
+            </a:extLst>
+          </p:cNvPr>
+          <p:cNvSpPr>
+            <a:spLocks noGrp="1"/>
+          </p:cNvSpPr>
+          <p:nvPr>
+            <p:ph type="title"/>
+          </p:nvPr>
+        </p:nvSpPr>
+        <p:spPr>
+          <a:xfrm>
+            <a:off x="878638" y="284924"/>
+            <a:ext cx="6687313" cy="826008"/>
+          </a:xfrm>
+        </p:spPr>
+        <p:txBody>
+          <a:bodyPr/>
+          <a:lstStyle/>
+          <a:p>
+            <a:r>
+              <a:rPr lang="es-CL" b="1" dirty="0"/>
+              <a:t>Sprint Backlog y casos de uso</a:t>
+            </a:r>
+          </a:p>
+        </p:txBody>
+      </p:sp>
+      <p:pic>
+        <p:nvPicPr>
+          <p:cNvPr id="5" name="Marcador de contenido 4">
+            <a:extLst>
+              <a:ext uri="{FF2B5EF4-FFF2-40B4-BE49-F238E27FC236}">
+                <a16:creationId xmlns:a16="http://schemas.microsoft.com/office/drawing/2014/main" id="{98304ADB-99DD-4575-BA4D-26BD853F97E4}"/>
+              </a:ext>
+            </a:extLst>
+          </p:cNvPr>
+          <p:cNvPicPr>
+            <a:picLocks noGrp="1" noChangeAspect="1"/>
+          </p:cNvPicPr>
+          <p:nvPr>
+            <p:ph idx="1"/>
+          </p:nvPr>
+        </p:nvPicPr>
+        <p:blipFill>
+          <a:blip r:embed="rId2"/>
+          <a:stretch>
+            <a:fillRect/>
+          </a:stretch>
+        </p:blipFill>
+        <p:spPr>
+          <a:xfrm>
+            <a:off x="180777" y="1590927"/>
+            <a:ext cx="7342094" cy="2707230"/>
+          </a:xfrm>
+          <a:prstGeom prst="rect">
+            <a:avLst/>
+          </a:prstGeom>
+          <a:ln>
+            <a:noFill/>
+          </a:ln>
+          <a:effectLst>
+            <a:outerShdw blurRad="292100" dist="139700" dir="2700000" algn="tl" rotWithShape="0">
+              <a:srgbClr val="333333">
+                <a:alpha val="65000"/>
+              </a:srgbClr>
+            </a:outerShdw>
+          </a:effectLst>
+        </p:spPr>
+      </p:pic>
+      <p:pic>
+        <p:nvPicPr>
+          <p:cNvPr id="7" name="Imagen 6">
+            <a:extLst>
+              <a:ext uri="{FF2B5EF4-FFF2-40B4-BE49-F238E27FC236}">
+                <a16:creationId xmlns:a16="http://schemas.microsoft.com/office/drawing/2014/main" id="{C326FECB-BE6E-4807-B410-EFB562C83276}"/>
+              </a:ext>
+            </a:extLst>
+          </p:cNvPr>
+          <p:cNvPicPr>
+            <a:picLocks noChangeAspect="1"/>
+          </p:cNvPicPr>
+          <p:nvPr/>
+        </p:nvPicPr>
+        <p:blipFill>
+          <a:blip r:embed="rId3"/>
+          <a:stretch>
+            <a:fillRect/>
+          </a:stretch>
+        </p:blipFill>
+        <p:spPr>
+          <a:xfrm>
+            <a:off x="180777" y="4304082"/>
+            <a:ext cx="7342094" cy="1925982"/>
+          </a:xfrm>
+          <a:prstGeom prst="rect">
+            <a:avLst/>
+          </a:prstGeom>
+          <a:ln>
+            <a:noFill/>
+          </a:ln>
+          <a:effectLst>
+            <a:outerShdw blurRad="292100" dist="139700" dir="2700000" algn="tl" rotWithShape="0">
+              <a:srgbClr val="333333">
+                <a:alpha val="65000"/>
+              </a:srgbClr>
+            </a:outerShdw>
+          </a:effectLst>
+        </p:spPr>
+      </p:pic>
+      <p:pic>
+        <p:nvPicPr>
+          <p:cNvPr id="3" name="Imagen 2" descr="Icono&#10;&#10;El contenido generado por IA puede ser incorrecto.">
+            <a:extLst>
+              <a:ext uri="{FF2B5EF4-FFF2-40B4-BE49-F238E27FC236}">
+                <a16:creationId xmlns:a16="http://schemas.microsoft.com/office/drawing/2014/main" id="{6A9B57C9-1573-DBD3-FC14-AE20EF3EA83D}"/>
+              </a:ext>
+            </a:extLst>
+          </p:cNvPr>
+          <p:cNvPicPr>
+            <a:picLocks noChangeAspect="1"/>
+          </p:cNvPicPr>
+          <p:nvPr/>
+        </p:nvPicPr>
+        <p:blipFill>
+          <a:blip r:embed="rId4"/>
+          <a:stretch>
+            <a:fillRect/>
+          </a:stretch>
+        </p:blipFill>
+        <p:spPr>
+          <a:xfrm>
+            <a:off x="7764292" y="108352"/>
+            <a:ext cx="1137067" cy="956207"/>
+          </a:xfrm>
+          <a:prstGeom prst="rect">
+            <a:avLst/>
+          </a:prstGeom>
+        </p:spPr>
+      </p:pic>
+      <p:pic>
+        <p:nvPicPr>
+          <p:cNvPr id="4" name="Picture 2" descr="Eugcom.cl">
+            <a:extLst>
+              <a:ext uri="{FF2B5EF4-FFF2-40B4-BE49-F238E27FC236}">
+                <a16:creationId xmlns:a16="http://schemas.microsoft.com/office/drawing/2014/main" id="{5338FE38-9D51-9BCD-0622-679A5F7255EC}"/>
+              </a:ext>
+            </a:extLst>
+          </p:cNvPr>
+          <p:cNvPicPr>
+            <a:picLocks noChangeAspect="1" noChangeArrowheads="1"/>
+          </p:cNvPicPr>
+          <p:nvPr/>
+        </p:nvPicPr>
+        <p:blipFill>
+          <a:blip r:embed="rId5">
+            <a:extLst>
+              <a:ext uri="{28A0092B-C50C-407E-A947-70E740481C1C}">
+                <a14:useLocalDpi xmlns:a14="http://schemas.microsoft.com/office/drawing/2010/main" val="0"/>
+              </a:ext>
+            </a:extLst>
+          </a:blip>
+          <a:srcRect/>
+          <a:stretch>
+            <a:fillRect/>
+          </a:stretch>
+        </p:blipFill>
+        <p:spPr bwMode="auto">
+          <a:xfrm>
+            <a:off x="102849" y="108353"/>
+            <a:ext cx="577448" cy="577448"/>
+          </a:xfrm>
+          <a:prstGeom prst="rect">
+            <a:avLst/>
+          </a:prstGeom>
+          <a:noFill/>
+          <a:extLst>
+            <a:ext uri="{909E8E84-426E-40DD-AFC4-6F175D3DCCD1}">
+              <a14:hiddenFill xmlns:a14="http://schemas.microsoft.com/office/drawing/2010/main">
+                <a:solidFill>
+                  <a:srgbClr val="FFFFFF"/>
+                </a:solidFill>
+              </a14:hiddenFill>
+            </a:ext>
+          </a:extLst>
+        </p:spPr>
+      </p:pic>
+    </p:spTree>
+    <p:extLst>
+      <p:ext uri="{BB962C8B-B14F-4D97-AF65-F5344CB8AC3E}">
+        <p14:creationId xmlns:p14="http://schemas.microsoft.com/office/powerpoint/2010/main" val="157445369"/>
+      </p:ext>
+    </p:extLst>
   </p:cSld>
   <p:clrMapOvr>
     <a:masterClrMapping/>
@@ -9103,7 +9684,7 @@
           <p:cNvPr id="2" name="Título 1">
             <a:extLst>
               <a:ext uri="{FF2B5EF4-FFF2-40B4-BE49-F238E27FC236}">
-                <a16:creationId xmlns:a16="http://schemas.microsoft.com/office/drawing/2014/main" id="{DD908331-17C3-4D0E-A3B7-4B0FCF8818DF}"/>
+                <a16:creationId xmlns:a16="http://schemas.microsoft.com/office/drawing/2014/main" id="{8E4A4D2D-A1BC-861C-7886-0067FFF2B614}"/>
               </a:ext>
             </a:extLst>
           </p:cNvPr>
@@ -9114,33 +9695,36 @@
             <p:ph type="title"/>
           </p:nvPr>
         </p:nvSpPr>
-        <p:spPr/>
+        <p:spPr>
+          <a:xfrm>
+            <a:off x="1990341" y="305817"/>
+            <a:ext cx="3962401" cy="758742"/>
+          </a:xfrm>
+        </p:spPr>
         <p:txBody>
           <a:bodyPr/>
           <a:lstStyle/>
           <a:p>
             <a:r>
-              <a:rPr lang="es-CL" dirty="0"/>
-              <a:t>Sprint Backlog y casos de uso</a:t>
+              <a:rPr lang="es-CL" b="1" dirty="0"/>
+              <a:t>Tabla de esfuerzo</a:t>
             </a:r>
           </a:p>
         </p:txBody>
       </p:sp>
       <p:pic>
         <p:nvPicPr>
-          <p:cNvPr id="5" name="Marcador de contenido 4">
+          <p:cNvPr id="6" name="Imagen 5" descr="Icono&#10;&#10;El contenido generado por IA puede ser incorrecto.">
             <a:extLst>
               <a:ext uri="{FF2B5EF4-FFF2-40B4-BE49-F238E27FC236}">
-                <a16:creationId xmlns:a16="http://schemas.microsoft.com/office/drawing/2014/main" id="{98304ADB-99DD-4575-BA4D-26BD853F97E4}"/>
+                <a16:creationId xmlns:a16="http://schemas.microsoft.com/office/drawing/2014/main" id="{0229C12C-E696-0EC6-D066-1A7E8B7079B2}"/>
               </a:ext>
             </a:extLst>
           </p:cNvPr>
           <p:cNvPicPr>
-            <a:picLocks noGrp="1" noChangeAspect="1"/>
+            <a:picLocks noChangeAspect="1"/>
           </p:cNvPicPr>
-          <p:nvPr>
-            <p:ph idx="1"/>
-          </p:nvPr>
+          <p:nvPr/>
         </p:nvPicPr>
         <p:blipFill>
           <a:blip r:embed="rId2"/>
@@ -9150,17 +9734,67 @@
         </p:blipFill>
         <p:spPr>
           <a:xfrm>
-            <a:off x="71718" y="1536063"/>
-            <a:ext cx="7342094" cy="2707230"/>
+            <a:off x="7764292" y="108352"/>
+            <a:ext cx="1137067" cy="956207"/>
           </a:xfrm>
+          <a:prstGeom prst="rect">
+            <a:avLst/>
+          </a:prstGeom>
         </p:spPr>
       </p:pic>
       <p:pic>
         <p:nvPicPr>
-          <p:cNvPr id="7" name="Imagen 6">
+          <p:cNvPr id="8" name="Picture 2" descr="Eugcom.cl">
             <a:extLst>
               <a:ext uri="{FF2B5EF4-FFF2-40B4-BE49-F238E27FC236}">
-                <a16:creationId xmlns:a16="http://schemas.microsoft.com/office/drawing/2014/main" id="{C326FECB-BE6E-4807-B410-EFB562C83276}"/>
+                <a16:creationId xmlns:a16="http://schemas.microsoft.com/office/drawing/2014/main" id="{78B1BC20-FDE9-0730-F35E-6528A34C3315}"/>
+              </a:ext>
+            </a:extLst>
+          </p:cNvPr>
+          <p:cNvPicPr>
+            <a:picLocks noChangeAspect="1" noChangeArrowheads="1"/>
+          </p:cNvPicPr>
+          <p:nvPr/>
+        </p:nvPicPr>
+        <p:blipFill>
+          <a:blip r:embed="rId3">
+            <a:extLst>
+              <a:ext uri="{28A0092B-C50C-407E-A947-70E740481C1C}">
+                <a14:useLocalDpi xmlns:a14="http://schemas.microsoft.com/office/drawing/2010/main" val="0"/>
+              </a:ext>
+            </a:extLst>
+          </a:blip>
+          <a:srcRect/>
+          <a:stretch>
+            <a:fillRect/>
+          </a:stretch>
+        </p:blipFill>
+        <p:spPr bwMode="auto">
+          <a:xfrm>
+            <a:off x="102849" y="108353"/>
+            <a:ext cx="577448" cy="577448"/>
+          </a:xfrm>
+          <a:prstGeom prst="rect">
+            <a:avLst/>
+          </a:prstGeom>
+          <a:noFill/>
+          <a:extLst>
+            <a:ext uri="{909E8E84-426E-40DD-AFC4-6F175D3DCCD1}">
+              <a14:hiddenFill xmlns:a14="http://schemas.microsoft.com/office/drawing/2010/main">
+                <a:solidFill>
+                  <a:srgbClr val="FFFFFF"/>
+                </a:solidFill>
+              </a14:hiddenFill>
+            </a:ext>
+          </a:extLst>
+        </p:spPr>
+      </p:pic>
+      <p:pic>
+        <p:nvPicPr>
+          <p:cNvPr id="12" name="Imagen 11" descr="Imagen que contiene biombo, edificio, jaula, torre&#10;&#10;El contenido generado por IA puede ser incorrecto.">
+            <a:extLst>
+              <a:ext uri="{FF2B5EF4-FFF2-40B4-BE49-F238E27FC236}">
+                <a16:creationId xmlns:a16="http://schemas.microsoft.com/office/drawing/2014/main" id="{A35D159C-80DE-8D67-8CEB-5E8E2F0B0B96}"/>
               </a:ext>
             </a:extLst>
           </p:cNvPr>
@@ -9170,25 +9804,115 @@
           <p:nvPr/>
         </p:nvPicPr>
         <p:blipFill>
-          <a:blip r:embed="rId3"/>
+          <a:blip r:embed="rId4"/>
           <a:stretch>
             <a:fillRect/>
           </a:stretch>
         </p:blipFill>
         <p:spPr>
           <a:xfrm>
-            <a:off x="71718" y="4243293"/>
-            <a:ext cx="7342094" cy="1925982"/>
+            <a:off x="1170432" y="1182534"/>
+            <a:ext cx="6156322" cy="1920719"/>
           </a:xfrm>
           <a:prstGeom prst="rect">
             <a:avLst/>
           </a:prstGeom>
+          <a:ln>
+            <a:noFill/>
+          </a:ln>
+          <a:effectLst>
+            <a:outerShdw blurRad="292100" dist="139700" dir="2700000" algn="tl" rotWithShape="0">
+              <a:srgbClr val="333333">
+                <a:alpha val="65000"/>
+              </a:srgbClr>
+            </a:outerShdw>
+          </a:effectLst>
+        </p:spPr>
+      </p:pic>
+      <p:pic>
+        <p:nvPicPr>
+          <p:cNvPr id="13" name="Imagen 12" descr="Imagen que contiene edificio, biombo&#10;&#10;El contenido generado por IA puede ser incorrecto.">
+            <a:extLst>
+              <a:ext uri="{FF2B5EF4-FFF2-40B4-BE49-F238E27FC236}">
+                <a16:creationId xmlns:a16="http://schemas.microsoft.com/office/drawing/2014/main" id="{3DA94CE3-BDA3-13D1-963A-87823BED40EA}"/>
+              </a:ext>
+            </a:extLst>
+          </p:cNvPr>
+          <p:cNvPicPr>
+            <a:picLocks noChangeAspect="1"/>
+          </p:cNvPicPr>
+          <p:nvPr/>
+        </p:nvPicPr>
+        <p:blipFill>
+          <a:blip r:embed="rId5"/>
+          <a:stretch>
+            <a:fillRect/>
+          </a:stretch>
+        </p:blipFill>
+        <p:spPr>
+          <a:xfrm>
+            <a:off x="1170432" y="3103253"/>
+            <a:ext cx="6156322" cy="2086400"/>
+          </a:xfrm>
+          <a:prstGeom prst="rect">
+            <a:avLst/>
+          </a:prstGeom>
+          <a:ln>
+            <a:noFill/>
+          </a:ln>
+          <a:effectLst>
+            <a:outerShdw blurRad="292100" dist="139700" dir="2700000" algn="tl" rotWithShape="0">
+              <a:srgbClr val="333333">
+                <a:alpha val="65000"/>
+              </a:srgbClr>
+            </a:outerShdw>
+          </a:effectLst>
+        </p:spPr>
+      </p:pic>
+      <p:pic>
+        <p:nvPicPr>
+          <p:cNvPr id="14" name="Imagen 13" descr="Imagen que contiene Patrón de fondo&#10;&#10;El contenido generado por IA puede ser incorrecto.">
+            <a:extLst>
+              <a:ext uri="{FF2B5EF4-FFF2-40B4-BE49-F238E27FC236}">
+                <a16:creationId xmlns:a16="http://schemas.microsoft.com/office/drawing/2014/main" id="{F6CC3600-7393-13FB-0D0E-01F2681E01A2}"/>
+              </a:ext>
+            </a:extLst>
+          </p:cNvPr>
+          <p:cNvPicPr>
+            <a:picLocks noChangeAspect="1"/>
+          </p:cNvPicPr>
+          <p:nvPr/>
+        </p:nvPicPr>
+        <p:blipFill>
+          <a:blip r:embed="rId6"/>
+          <a:stretch>
+            <a:fillRect/>
+          </a:stretch>
+        </p:blipFill>
+        <p:spPr>
+          <a:xfrm>
+            <a:off x="1170432" y="5197093"/>
+            <a:ext cx="6156322" cy="1355090"/>
+          </a:xfrm>
+          <a:prstGeom prst="rect">
+            <a:avLst/>
+          </a:prstGeom>
+          <a:ln>
+            <a:noFill/>
+          </a:ln>
+          <a:effectLst>
+            <a:outerShdw blurRad="292100" dist="139700" dir="2700000" algn="tl" rotWithShape="0">
+              <a:srgbClr val="333333">
+                <a:alpha val="65000"/>
+              </a:srgbClr>
+            </a:outerShdw>
+          </a:effectLst>
         </p:spPr>
       </p:pic>
     </p:spTree>
     <p:extLst>
       <p:ext uri="{BB962C8B-B14F-4D97-AF65-F5344CB8AC3E}">
-        <p14:creationId xmlns:p14="http://schemas.microsoft.com/office/powerpoint/2010/main" val="157445369"/>
+        <p14:creationId xmlns:p14="http://schemas.microsoft.com/office/powerpoint/2010/main" val="2393607889"/>
       </p:ext>
     </p:extLst>
   </p:cSld>
